--- a/koreatech-db/weeks/07주차_조인_JOIN.pptx
+++ b/koreatech-db/weeks/07주차_조인_JOIN.pptx
@@ -4062,9 +4062,9 @@
                 <a:solidFill>
                   <a:srgbClr val="7A869C"/>
                 </a:solidFill>
-                <a:latin typeface="나눔고딕코딩"/>
-                <a:ea typeface="나눔고딕코딩"/>
-                <a:cs typeface="나눔고딕코딩"/>
+                <a:latin typeface="D2Coding"/>
+                <a:ea typeface="D2Coding"/>
+                <a:cs typeface="D2Coding"/>
               </a:rPr>
               <a:t>1</a:t>
             </a:r>
@@ -4080,9 +4080,9 @@
                 <a:solidFill>
                   <a:srgbClr val="7A869C"/>
                 </a:solidFill>
-                <a:latin typeface="나눔고딕코딩"/>
-                <a:ea typeface="나눔고딕코딩"/>
-                <a:cs typeface="나눔고딕코딩"/>
+                <a:latin typeface="D2Coding"/>
+                <a:ea typeface="D2Coding"/>
+                <a:cs typeface="D2Coding"/>
               </a:rPr>
               <a:t>2</a:t>
             </a:r>
@@ -4098,9 +4098,9 @@
                 <a:solidFill>
                   <a:srgbClr val="7A869C"/>
                 </a:solidFill>
-                <a:latin typeface="나눔고딕코딩"/>
-                <a:ea typeface="나눔고딕코딩"/>
-                <a:cs typeface="나눔고딕코딩"/>
+                <a:latin typeface="D2Coding"/>
+                <a:ea typeface="D2Coding"/>
+                <a:cs typeface="D2Coding"/>
               </a:rPr>
               <a:t>3</a:t>
             </a:r>
@@ -4139,9 +4139,9 @@
                 <a:solidFill>
                   <a:srgbClr val="E6EAF2"/>
                 </a:solidFill>
-                <a:latin typeface="나눔고딕코딩"/>
-                <a:ea typeface="나눔고딕코딩"/>
-                <a:cs typeface="나눔고딕코딩"/>
+                <a:latin typeface="D2Coding"/>
+                <a:ea typeface="D2Coding"/>
+                <a:cs typeface="D2Coding"/>
               </a:rPr>
               <a:t>SELECT c.name, o.order_id</a:t>
             </a:r>
@@ -4157,9 +4157,9 @@
                 <a:solidFill>
                   <a:srgbClr val="E6EAF2"/>
                 </a:solidFill>
-                <a:latin typeface="나눔고딕코딩"/>
-                <a:ea typeface="나눔고딕코딩"/>
-                <a:cs typeface="나눔고딕코딩"/>
+                <a:latin typeface="D2Coding"/>
+                <a:ea typeface="D2Coding"/>
+                <a:cs typeface="D2Coding"/>
               </a:rPr>
               <a:t>FROM   customers c JOIN orders o ON c.cust_id = o.cust_id;</a:t>
             </a:r>
@@ -4175,9 +4175,9 @@
                 <a:solidFill>
                   <a:srgbClr val="E6EAF2"/>
                 </a:solidFill>
-                <a:latin typeface="나눔고딕코딩"/>
-                <a:ea typeface="나눔고딕코딩"/>
-                <a:cs typeface="나눔고딕코딩"/>
+                <a:latin typeface="D2Coding"/>
+                <a:ea typeface="D2Coding"/>
+                <a:cs typeface="D2Coding"/>
               </a:rPr>
               <a:t>-- 주문이 없는 고객(서지안)은 결과에서 사라진다</a:t>
             </a:r>
@@ -4469,9 +4469,9 @@
                 <a:solidFill>
                   <a:srgbClr val="7A869C"/>
                 </a:solidFill>
-                <a:latin typeface="나눔고딕코딩"/>
-                <a:ea typeface="나눔고딕코딩"/>
-                <a:cs typeface="나눔고딕코딩"/>
+                <a:latin typeface="D2Coding"/>
+                <a:ea typeface="D2Coding"/>
+                <a:cs typeface="D2Coding"/>
               </a:rPr>
               <a:t>1</a:t>
             </a:r>
@@ -4487,9 +4487,9 @@
                 <a:solidFill>
                   <a:srgbClr val="7A869C"/>
                 </a:solidFill>
-                <a:latin typeface="나눔고딕코딩"/>
-                <a:ea typeface="나눔고딕코딩"/>
-                <a:cs typeface="나눔고딕코딩"/>
+                <a:latin typeface="D2Coding"/>
+                <a:ea typeface="D2Coding"/>
+                <a:cs typeface="D2Coding"/>
               </a:rPr>
               <a:t>2</a:t>
             </a:r>
@@ -4505,9 +4505,9 @@
                 <a:solidFill>
                   <a:srgbClr val="7A869C"/>
                 </a:solidFill>
-                <a:latin typeface="나눔고딕코딩"/>
-                <a:ea typeface="나눔고딕코딩"/>
-                <a:cs typeface="나눔고딕코딩"/>
+                <a:latin typeface="D2Coding"/>
+                <a:ea typeface="D2Coding"/>
+                <a:cs typeface="D2Coding"/>
               </a:rPr>
               <a:t>3</a:t>
             </a:r>
@@ -4523,9 +4523,9 @@
                 <a:solidFill>
                   <a:srgbClr val="7A869C"/>
                 </a:solidFill>
-                <a:latin typeface="나눔고딕코딩"/>
-                <a:ea typeface="나눔고딕코딩"/>
-                <a:cs typeface="나눔고딕코딩"/>
+                <a:latin typeface="D2Coding"/>
+                <a:ea typeface="D2Coding"/>
+                <a:cs typeface="D2Coding"/>
               </a:rPr>
               <a:t>4</a:t>
             </a:r>
@@ -4541,9 +4541,9 @@
                 <a:solidFill>
                   <a:srgbClr val="7A869C"/>
                 </a:solidFill>
-                <a:latin typeface="나눔고딕코딩"/>
-                <a:ea typeface="나눔고딕코딩"/>
-                <a:cs typeface="나눔고딕코딩"/>
+                <a:latin typeface="D2Coding"/>
+                <a:ea typeface="D2Coding"/>
+                <a:cs typeface="D2Coding"/>
               </a:rPr>
               <a:t>5</a:t>
             </a:r>
@@ -4559,9 +4559,9 @@
                 <a:solidFill>
                   <a:srgbClr val="7A869C"/>
                 </a:solidFill>
-                <a:latin typeface="나눔고딕코딩"/>
-                <a:ea typeface="나눔고딕코딩"/>
-                <a:cs typeface="나눔고딕코딩"/>
+                <a:latin typeface="D2Coding"/>
+                <a:ea typeface="D2Coding"/>
+                <a:cs typeface="D2Coding"/>
               </a:rPr>
               <a:t>6</a:t>
             </a:r>
@@ -4577,9 +4577,9 @@
                 <a:solidFill>
                   <a:srgbClr val="7A869C"/>
                 </a:solidFill>
-                <a:latin typeface="나눔고딕코딩"/>
-                <a:ea typeface="나눔고딕코딩"/>
-                <a:cs typeface="나눔고딕코딩"/>
+                <a:latin typeface="D2Coding"/>
+                <a:ea typeface="D2Coding"/>
+                <a:cs typeface="D2Coding"/>
               </a:rPr>
               <a:t>7</a:t>
             </a:r>
@@ -4595,9 +4595,9 @@
                 <a:solidFill>
                   <a:srgbClr val="7A869C"/>
                 </a:solidFill>
-                <a:latin typeface="나눔고딕코딩"/>
-                <a:ea typeface="나눔고딕코딩"/>
-                <a:cs typeface="나눔고딕코딩"/>
+                <a:latin typeface="D2Coding"/>
+                <a:ea typeface="D2Coding"/>
+                <a:cs typeface="D2Coding"/>
               </a:rPr>
               <a:t>8</a:t>
             </a:r>
@@ -4613,9 +4613,9 @@
                 <a:solidFill>
                   <a:srgbClr val="7A869C"/>
                 </a:solidFill>
-                <a:latin typeface="나눔고딕코딩"/>
-                <a:ea typeface="나눔고딕코딩"/>
-                <a:cs typeface="나눔고딕코딩"/>
+                <a:latin typeface="D2Coding"/>
+                <a:ea typeface="D2Coding"/>
+                <a:cs typeface="D2Coding"/>
               </a:rPr>
               <a:t>9</a:t>
             </a:r>
@@ -4654,9 +4654,9 @@
                 <a:solidFill>
                   <a:srgbClr val="E6EAF2"/>
                 </a:solidFill>
-                <a:latin typeface="나눔고딕코딩"/>
-                <a:ea typeface="나눔고딕코딩"/>
-                <a:cs typeface="나눔고딕코딩"/>
+                <a:latin typeface="D2Coding"/>
+                <a:ea typeface="D2Coding"/>
+                <a:cs typeface="D2Coding"/>
               </a:rPr>
               <a:t>SELECT c.name, o.order_id</a:t>
             </a:r>
@@ -4672,9 +4672,9 @@
                 <a:solidFill>
                   <a:srgbClr val="E6EAF2"/>
                 </a:solidFill>
-                <a:latin typeface="나눔고딕코딩"/>
-                <a:ea typeface="나눔고딕코딩"/>
-                <a:cs typeface="나눔고딕코딩"/>
+                <a:latin typeface="D2Coding"/>
+                <a:ea typeface="D2Coding"/>
+                <a:cs typeface="D2Coding"/>
               </a:rPr>
               <a:t>FROM   customers c</a:t>
             </a:r>
@@ -4690,9 +4690,9 @@
                 <a:solidFill>
                   <a:srgbClr val="E6EAF2"/>
                 </a:solidFill>
-                <a:latin typeface="나눔고딕코딩"/>
-                <a:ea typeface="나눔고딕코딩"/>
-                <a:cs typeface="나눔고딕코딩"/>
+                <a:latin typeface="D2Coding"/>
+                <a:ea typeface="D2Coding"/>
+                <a:cs typeface="D2Coding"/>
               </a:rPr>
               <a:t>LEFT   JOIN orders o ON c.cust_id = o.cust_id;</a:t>
             </a:r>
@@ -4708,9 +4708,9 @@
                 <a:solidFill>
                   <a:srgbClr val="E6EAF2"/>
                 </a:solidFill>
-                <a:latin typeface="나눔고딕코딩"/>
-                <a:ea typeface="나눔고딕코딩"/>
-                <a:cs typeface="나눔고딕코딩"/>
+                <a:latin typeface="D2Coding"/>
+                <a:ea typeface="D2Coding"/>
+                <a:cs typeface="D2Coding"/>
               </a:rPr>
               <a:t>/*</a:t>
             </a:r>
@@ -4726,9 +4726,9 @@
                 <a:solidFill>
                   <a:srgbClr val="E6EAF2"/>
                 </a:solidFill>
-                <a:latin typeface="나눔고딕코딩"/>
-                <a:ea typeface="나눔고딕코딩"/>
-                <a:cs typeface="나눔고딕코딩"/>
+                <a:latin typeface="D2Coding"/>
+                <a:ea typeface="D2Coding"/>
+                <a:cs typeface="D2Coding"/>
               </a:rPr>
               <a:t> 한가람 | 1001</a:t>
             </a:r>
@@ -4744,9 +4744,9 @@
                 <a:solidFill>
                   <a:srgbClr val="E6EAF2"/>
                 </a:solidFill>
-                <a:latin typeface="나눔고딕코딩"/>
-                <a:ea typeface="나눔고딕코딩"/>
-                <a:cs typeface="나눔고딕코딩"/>
+                <a:latin typeface="D2Coding"/>
+                <a:ea typeface="D2Coding"/>
+                <a:cs typeface="D2Coding"/>
               </a:rPr>
               <a:t> 한가람 | 1004</a:t>
             </a:r>
@@ -4762,9 +4762,9 @@
                 <a:solidFill>
                   <a:srgbClr val="E6EAF2"/>
                 </a:solidFill>
-                <a:latin typeface="나눔고딕코딩"/>
-                <a:ea typeface="나눔고딕코딩"/>
-                <a:cs typeface="나눔고딕코딩"/>
+                <a:latin typeface="D2Coding"/>
+                <a:ea typeface="D2Coding"/>
+                <a:cs typeface="D2Coding"/>
               </a:rPr>
               <a:t> ...</a:t>
             </a:r>
@@ -4780,9 +4780,9 @@
                 <a:solidFill>
                   <a:srgbClr val="E6EAF2"/>
                 </a:solidFill>
-                <a:latin typeface="나눔고딕코딩"/>
-                <a:ea typeface="나눔고딕코딩"/>
-                <a:cs typeface="나눔고딕코딩"/>
+                <a:latin typeface="D2Coding"/>
+                <a:ea typeface="D2Coding"/>
+                <a:cs typeface="D2Coding"/>
               </a:rPr>
               <a:t> 서지안 | NULL</a:t>
             </a:r>
@@ -4798,9 +4798,9 @@
                 <a:solidFill>
                   <a:srgbClr val="E6EAF2"/>
                 </a:solidFill>
-                <a:latin typeface="나눔고딕코딩"/>
-                <a:ea typeface="나눔고딕코딩"/>
-                <a:cs typeface="나눔고딕코딩"/>
+                <a:latin typeface="D2Coding"/>
+                <a:ea typeface="D2Coding"/>
+                <a:cs typeface="D2Coding"/>
               </a:rPr>
               <a:t>*/</a:t>
             </a:r>
@@ -5574,9 +5574,9 @@
                 <a:solidFill>
                   <a:srgbClr val="7A869C"/>
                 </a:solidFill>
-                <a:latin typeface="나눔고딕코딩"/>
-                <a:ea typeface="나눔고딕코딩"/>
-                <a:cs typeface="나눔고딕코딩"/>
+                <a:latin typeface="D2Coding"/>
+                <a:ea typeface="D2Coding"/>
+                <a:cs typeface="D2Coding"/>
               </a:rPr>
               <a:t>1</a:t>
             </a:r>
@@ -5592,9 +5592,9 @@
                 <a:solidFill>
                   <a:srgbClr val="7A869C"/>
                 </a:solidFill>
-                <a:latin typeface="나눔고딕코딩"/>
-                <a:ea typeface="나눔고딕코딩"/>
-                <a:cs typeface="나눔고딕코딩"/>
+                <a:latin typeface="D2Coding"/>
+                <a:ea typeface="D2Coding"/>
+                <a:cs typeface="D2Coding"/>
               </a:rPr>
               <a:t>2</a:t>
             </a:r>
@@ -5610,9 +5610,9 @@
                 <a:solidFill>
                   <a:srgbClr val="7A869C"/>
                 </a:solidFill>
-                <a:latin typeface="나눔고딕코딩"/>
-                <a:ea typeface="나눔고딕코딩"/>
-                <a:cs typeface="나눔고딕코딩"/>
+                <a:latin typeface="D2Coding"/>
+                <a:ea typeface="D2Coding"/>
+                <a:cs typeface="D2Coding"/>
               </a:rPr>
               <a:t>3</a:t>
             </a:r>
@@ -5628,9 +5628,9 @@
                 <a:solidFill>
                   <a:srgbClr val="7A869C"/>
                 </a:solidFill>
-                <a:latin typeface="나눔고딕코딩"/>
-                <a:ea typeface="나눔고딕코딩"/>
-                <a:cs typeface="나눔고딕코딩"/>
+                <a:latin typeface="D2Coding"/>
+                <a:ea typeface="D2Coding"/>
+                <a:cs typeface="D2Coding"/>
               </a:rPr>
               <a:t>4</a:t>
             </a:r>
@@ -5646,9 +5646,9 @@
                 <a:solidFill>
                   <a:srgbClr val="7A869C"/>
                 </a:solidFill>
-                <a:latin typeface="나눔고딕코딩"/>
-                <a:ea typeface="나눔고딕코딩"/>
-                <a:cs typeface="나눔고딕코딩"/>
+                <a:latin typeface="D2Coding"/>
+                <a:ea typeface="D2Coding"/>
+                <a:cs typeface="D2Coding"/>
               </a:rPr>
               <a:t>5</a:t>
             </a:r>
@@ -5664,9 +5664,9 @@
                 <a:solidFill>
                   <a:srgbClr val="7A869C"/>
                 </a:solidFill>
-                <a:latin typeface="나눔고딕코딩"/>
-                <a:ea typeface="나눔고딕코딩"/>
-                <a:cs typeface="나눔고딕코딩"/>
+                <a:latin typeface="D2Coding"/>
+                <a:ea typeface="D2Coding"/>
+                <a:cs typeface="D2Coding"/>
               </a:rPr>
               <a:t>6</a:t>
             </a:r>
@@ -5682,9 +5682,9 @@
                 <a:solidFill>
                   <a:srgbClr val="7A869C"/>
                 </a:solidFill>
-                <a:latin typeface="나눔고딕코딩"/>
-                <a:ea typeface="나눔고딕코딩"/>
-                <a:cs typeface="나눔고딕코딩"/>
+                <a:latin typeface="D2Coding"/>
+                <a:ea typeface="D2Coding"/>
+                <a:cs typeface="D2Coding"/>
               </a:rPr>
               <a:t>7</a:t>
             </a:r>
@@ -5700,9 +5700,9 @@
                 <a:solidFill>
                   <a:srgbClr val="7A869C"/>
                 </a:solidFill>
-                <a:latin typeface="나눔고딕코딩"/>
-                <a:ea typeface="나눔고딕코딩"/>
-                <a:cs typeface="나눔고딕코딩"/>
+                <a:latin typeface="D2Coding"/>
+                <a:ea typeface="D2Coding"/>
+                <a:cs typeface="D2Coding"/>
               </a:rPr>
               <a:t>8</a:t>
             </a:r>
@@ -5718,9 +5718,9 @@
                 <a:solidFill>
                   <a:srgbClr val="7A869C"/>
                 </a:solidFill>
-                <a:latin typeface="나눔고딕코딩"/>
-                <a:ea typeface="나눔고딕코딩"/>
-                <a:cs typeface="나눔고딕코딩"/>
+                <a:latin typeface="D2Coding"/>
+                <a:ea typeface="D2Coding"/>
+                <a:cs typeface="D2Coding"/>
               </a:rPr>
               <a:t>9</a:t>
             </a:r>
@@ -5736,9 +5736,9 @@
                 <a:solidFill>
                   <a:srgbClr val="7A869C"/>
                 </a:solidFill>
-                <a:latin typeface="나눔고딕코딩"/>
-                <a:ea typeface="나눔고딕코딩"/>
-                <a:cs typeface="나눔고딕코딩"/>
+                <a:latin typeface="D2Coding"/>
+                <a:ea typeface="D2Coding"/>
+                <a:cs typeface="D2Coding"/>
               </a:rPr>
               <a:t>10</a:t>
             </a:r>
@@ -5754,9 +5754,9 @@
                 <a:solidFill>
                   <a:srgbClr val="7A869C"/>
                 </a:solidFill>
-                <a:latin typeface="나눔고딕코딩"/>
-                <a:ea typeface="나눔고딕코딩"/>
-                <a:cs typeface="나눔고딕코딩"/>
+                <a:latin typeface="D2Coding"/>
+                <a:ea typeface="D2Coding"/>
+                <a:cs typeface="D2Coding"/>
               </a:rPr>
               <a:t>11</a:t>
             </a:r>
@@ -5795,9 +5795,9 @@
                 <a:solidFill>
                   <a:srgbClr val="E6EAF2"/>
                 </a:solidFill>
-                <a:latin typeface="나눔고딕코딩"/>
-                <a:ea typeface="나눔고딕코딩"/>
-                <a:cs typeface="나눔고딕코딩"/>
+                <a:latin typeface="D2Coding"/>
+                <a:ea typeface="D2Coding"/>
+                <a:cs typeface="D2Coding"/>
               </a:rPr>
               <a:t>SELECT c.cust_id, c.name</a:t>
             </a:r>
@@ -5813,9 +5813,9 @@
                 <a:solidFill>
                   <a:srgbClr val="E6EAF2"/>
                 </a:solidFill>
-                <a:latin typeface="나눔고딕코딩"/>
-                <a:ea typeface="나눔고딕코딩"/>
-                <a:cs typeface="나눔고딕코딩"/>
+                <a:latin typeface="D2Coding"/>
+                <a:ea typeface="D2Coding"/>
+                <a:cs typeface="D2Coding"/>
               </a:rPr>
               <a:t>FROM   customers c</a:t>
             </a:r>
@@ -5831,9 +5831,9 @@
                 <a:solidFill>
                   <a:srgbClr val="E6EAF2"/>
                 </a:solidFill>
-                <a:latin typeface="나눔고딕코딩"/>
-                <a:ea typeface="나눔고딕코딩"/>
-                <a:cs typeface="나눔고딕코딩"/>
+                <a:latin typeface="D2Coding"/>
+                <a:ea typeface="D2Coding"/>
+                <a:cs typeface="D2Coding"/>
               </a:rPr>
               <a:t>LEFT   JOIN orders o ON c.cust_id = o.cust_id</a:t>
             </a:r>
@@ -5849,9 +5849,9 @@
                 <a:solidFill>
                   <a:srgbClr val="E6EAF2"/>
                 </a:solidFill>
-                <a:latin typeface="나눔고딕코딩"/>
-                <a:ea typeface="나눔고딕코딩"/>
-                <a:cs typeface="나눔고딕코딩"/>
+                <a:latin typeface="D2Coding"/>
+                <a:ea typeface="D2Coding"/>
+                <a:cs typeface="D2Coding"/>
               </a:rPr>
               <a:t>WHERE  o.order_id IS NULL;</a:t>
             </a:r>
@@ -5867,9 +5867,9 @@
                 <a:solidFill>
                   <a:srgbClr val="E6EAF2"/>
                 </a:solidFill>
-                <a:latin typeface="나눔고딕코딩"/>
-                <a:ea typeface="나눔고딕코딩"/>
-                <a:cs typeface="나눔고딕코딩"/>
+                <a:latin typeface="D2Coding"/>
+                <a:ea typeface="D2Coding"/>
+                <a:cs typeface="D2Coding"/>
               </a:rPr>
               <a:t>--  C010 | 서지안</a:t>
             </a:r>
@@ -5885,9 +5885,9 @@
                 <a:solidFill>
                   <a:srgbClr val="E6EAF2"/>
                 </a:solidFill>
-                <a:latin typeface="나눔고딕코딩"/>
-                <a:ea typeface="나눔고딕코딩"/>
-                <a:cs typeface="나눔고딕코딩"/>
+                <a:latin typeface="D2Coding"/>
+                <a:ea typeface="D2Coding"/>
+                <a:cs typeface="D2Coding"/>
               </a:rPr>
               <a:t/>
             </a:r>
@@ -5903,9 +5903,9 @@
                 <a:solidFill>
                   <a:srgbClr val="E6EAF2"/>
                 </a:solidFill>
-                <a:latin typeface="나눔고딕코딩"/>
-                <a:ea typeface="나눔고딕코딩"/>
-                <a:cs typeface="나눔고딕코딩"/>
+                <a:latin typeface="D2Coding"/>
+                <a:ea typeface="D2Coding"/>
+                <a:cs typeface="D2Coding"/>
               </a:rPr>
               <a:t>SELECT p.prod_id, p.name</a:t>
             </a:r>
@@ -5921,9 +5921,9 @@
                 <a:solidFill>
                   <a:srgbClr val="E6EAF2"/>
                 </a:solidFill>
-                <a:latin typeface="나눔고딕코딩"/>
-                <a:ea typeface="나눔고딕코딩"/>
-                <a:cs typeface="나눔고딕코딩"/>
+                <a:latin typeface="D2Coding"/>
+                <a:ea typeface="D2Coding"/>
+                <a:cs typeface="D2Coding"/>
               </a:rPr>
               <a:t>FROM   products p</a:t>
             </a:r>
@@ -5939,9 +5939,9 @@
                 <a:solidFill>
                   <a:srgbClr val="E6EAF2"/>
                 </a:solidFill>
-                <a:latin typeface="나눔고딕코딩"/>
-                <a:ea typeface="나눔고딕코딩"/>
-                <a:cs typeface="나눔고딕코딩"/>
+                <a:latin typeface="D2Coding"/>
+                <a:ea typeface="D2Coding"/>
+                <a:cs typeface="D2Coding"/>
               </a:rPr>
               <a:t>LEFT   JOIN order_items i ON p.prod_id = i.prod_id</a:t>
             </a:r>
@@ -5957,9 +5957,9 @@
                 <a:solidFill>
                   <a:srgbClr val="E6EAF2"/>
                 </a:solidFill>
-                <a:latin typeface="나눔고딕코딩"/>
-                <a:ea typeface="나눔고딕코딩"/>
-                <a:cs typeface="나눔고딕코딩"/>
+                <a:latin typeface="D2Coding"/>
+                <a:ea typeface="D2Coding"/>
+                <a:cs typeface="D2Coding"/>
               </a:rPr>
               <a:t>WHERE  i.order_id IS NULL;</a:t>
             </a:r>
@@ -5975,9 +5975,9 @@
                 <a:solidFill>
                   <a:srgbClr val="E6EAF2"/>
                 </a:solidFill>
-                <a:latin typeface="나눔고딕코딩"/>
-                <a:ea typeface="나눔고딕코딩"/>
-                <a:cs typeface="나눔고딕코딩"/>
+                <a:latin typeface="D2Coding"/>
+                <a:ea typeface="D2Coding"/>
+                <a:cs typeface="D2Coding"/>
               </a:rPr>
               <a:t>--  P010 | A5 스프링 노트</a:t>
             </a:r>
@@ -7542,9 +7542,9 @@
                 <a:solidFill>
                   <a:srgbClr val="7A869C"/>
                 </a:solidFill>
-                <a:latin typeface="나눔고딕코딩"/>
-                <a:ea typeface="나눔고딕코딩"/>
-                <a:cs typeface="나눔고딕코딩"/>
+                <a:latin typeface="D2Coding"/>
+                <a:ea typeface="D2Coding"/>
+                <a:cs typeface="D2Coding"/>
               </a:rPr>
               <a:t>1</a:t>
             </a:r>
@@ -7560,9 +7560,9 @@
                 <a:solidFill>
                   <a:srgbClr val="7A869C"/>
                 </a:solidFill>
-                <a:latin typeface="나눔고딕코딩"/>
-                <a:ea typeface="나눔고딕코딩"/>
-                <a:cs typeface="나눔고딕코딩"/>
+                <a:latin typeface="D2Coding"/>
+                <a:ea typeface="D2Coding"/>
+                <a:cs typeface="D2Coding"/>
               </a:rPr>
               <a:t>2</a:t>
             </a:r>
@@ -7578,9 +7578,9 @@
                 <a:solidFill>
                   <a:srgbClr val="7A869C"/>
                 </a:solidFill>
-                <a:latin typeface="나눔고딕코딩"/>
-                <a:ea typeface="나눔고딕코딩"/>
-                <a:cs typeface="나눔고딕코딩"/>
+                <a:latin typeface="D2Coding"/>
+                <a:ea typeface="D2Coding"/>
+                <a:cs typeface="D2Coding"/>
               </a:rPr>
               <a:t>3</a:t>
             </a:r>
@@ -7596,9 +7596,9 @@
                 <a:solidFill>
                   <a:srgbClr val="7A869C"/>
                 </a:solidFill>
-                <a:latin typeface="나눔고딕코딩"/>
-                <a:ea typeface="나눔고딕코딩"/>
-                <a:cs typeface="나눔고딕코딩"/>
+                <a:latin typeface="D2Coding"/>
+                <a:ea typeface="D2Coding"/>
+                <a:cs typeface="D2Coding"/>
               </a:rPr>
               <a:t>4</a:t>
             </a:r>
@@ -7614,9 +7614,9 @@
                 <a:solidFill>
                   <a:srgbClr val="7A869C"/>
                 </a:solidFill>
-                <a:latin typeface="나눔고딕코딩"/>
-                <a:ea typeface="나눔고딕코딩"/>
-                <a:cs typeface="나눔고딕코딩"/>
+                <a:latin typeface="D2Coding"/>
+                <a:ea typeface="D2Coding"/>
+                <a:cs typeface="D2Coding"/>
               </a:rPr>
               <a:t>5</a:t>
             </a:r>
@@ -7632,9 +7632,9 @@
                 <a:solidFill>
                   <a:srgbClr val="7A869C"/>
                 </a:solidFill>
-                <a:latin typeface="나눔고딕코딩"/>
-                <a:ea typeface="나눔고딕코딩"/>
-                <a:cs typeface="나눔고딕코딩"/>
+                <a:latin typeface="D2Coding"/>
+                <a:ea typeface="D2Coding"/>
+                <a:cs typeface="D2Coding"/>
               </a:rPr>
               <a:t>6</a:t>
             </a:r>
@@ -7673,9 +7673,9 @@
                 <a:solidFill>
                   <a:srgbClr val="E6EAF2"/>
                 </a:solidFill>
-                <a:latin typeface="나눔고딕코딩"/>
-                <a:ea typeface="나눔고딕코딩"/>
-                <a:cs typeface="나눔고딕코딩"/>
+                <a:latin typeface="D2Coding"/>
+                <a:ea typeface="D2Coding"/>
+                <a:cs typeface="D2Coding"/>
               </a:rPr>
               <a:t>SELECT c.name, o.order_id, o.status</a:t>
             </a:r>
@@ -7691,9 +7691,9 @@
                 <a:solidFill>
                   <a:srgbClr val="E6EAF2"/>
                 </a:solidFill>
-                <a:latin typeface="나눔고딕코딩"/>
-                <a:ea typeface="나눔고딕코딩"/>
-                <a:cs typeface="나눔고딕코딩"/>
+                <a:latin typeface="D2Coding"/>
+                <a:ea typeface="D2Coding"/>
+                <a:cs typeface="D2Coding"/>
               </a:rPr>
               <a:t>FROM   customers c</a:t>
             </a:r>
@@ -7709,9 +7709,9 @@
                 <a:solidFill>
                   <a:srgbClr val="E6EAF2"/>
                 </a:solidFill>
-                <a:latin typeface="나눔고딕코딩"/>
-                <a:ea typeface="나눔고딕코딩"/>
-                <a:cs typeface="나눔고딕코딩"/>
+                <a:latin typeface="D2Coding"/>
+                <a:ea typeface="D2Coding"/>
+                <a:cs typeface="D2Coding"/>
               </a:rPr>
               <a:t>LEFT   JOIN orders o</a:t>
             </a:r>
@@ -7727,9 +7727,9 @@
                 <a:solidFill>
                   <a:srgbClr val="E6EAF2"/>
                 </a:solidFill>
-                <a:latin typeface="나눔고딕코딩"/>
-                <a:ea typeface="나눔고딕코딩"/>
-                <a:cs typeface="나눔고딕코딩"/>
+                <a:latin typeface="D2Coding"/>
+                <a:ea typeface="D2Coding"/>
+                <a:cs typeface="D2Coding"/>
               </a:rPr>
               <a:t>       ON c.cust_id = o.cust_id AND o.status = '배송완료';</a:t>
             </a:r>
@@ -7745,9 +7745,9 @@
                 <a:solidFill>
                   <a:srgbClr val="E6EAF2"/>
                 </a:solidFill>
-                <a:latin typeface="나눔고딕코딩"/>
-                <a:ea typeface="나눔고딕코딩"/>
-                <a:cs typeface="나눔고딕코딩"/>
+                <a:latin typeface="D2Coding"/>
+                <a:ea typeface="D2Coding"/>
+                <a:cs typeface="D2Coding"/>
               </a:rPr>
               <a:t>--  배송완료가 아닌 주문은 NULL 처리되지만</a:t>
             </a:r>
@@ -7763,9 +7763,9 @@
                 <a:solidFill>
                   <a:srgbClr val="E6EAF2"/>
                 </a:solidFill>
-                <a:latin typeface="나눔고딕코딩"/>
-                <a:ea typeface="나눔고딕코딩"/>
-                <a:cs typeface="나눔고딕코딩"/>
+                <a:latin typeface="D2Coding"/>
+                <a:ea typeface="D2Coding"/>
+                <a:cs typeface="D2Coding"/>
               </a:rPr>
               <a:t>--  고객 10명은 모두 표시</a:t>
             </a:r>
@@ -7997,9 +7997,9 @@
                 <a:solidFill>
                   <a:srgbClr val="7A869C"/>
                 </a:solidFill>
-                <a:latin typeface="나눔고딕코딩"/>
-                <a:ea typeface="나눔고딕코딩"/>
-                <a:cs typeface="나눔고딕코딩"/>
+                <a:latin typeface="D2Coding"/>
+                <a:ea typeface="D2Coding"/>
+                <a:cs typeface="D2Coding"/>
               </a:rPr>
               <a:t>1</a:t>
             </a:r>
@@ -8015,9 +8015,9 @@
                 <a:solidFill>
                   <a:srgbClr val="7A869C"/>
                 </a:solidFill>
-                <a:latin typeface="나눔고딕코딩"/>
-                <a:ea typeface="나눔고딕코딩"/>
-                <a:cs typeface="나눔고딕코딩"/>
+                <a:latin typeface="D2Coding"/>
+                <a:ea typeface="D2Coding"/>
+                <a:cs typeface="D2Coding"/>
               </a:rPr>
               <a:t>2</a:t>
             </a:r>
@@ -8033,9 +8033,9 @@
                 <a:solidFill>
                   <a:srgbClr val="7A869C"/>
                 </a:solidFill>
-                <a:latin typeface="나눔고딕코딩"/>
-                <a:ea typeface="나눔고딕코딩"/>
-                <a:cs typeface="나눔고딕코딩"/>
+                <a:latin typeface="D2Coding"/>
+                <a:ea typeface="D2Coding"/>
+                <a:cs typeface="D2Coding"/>
               </a:rPr>
               <a:t>3</a:t>
             </a:r>
@@ -8051,9 +8051,9 @@
                 <a:solidFill>
                   <a:srgbClr val="7A869C"/>
                 </a:solidFill>
-                <a:latin typeface="나눔고딕코딩"/>
-                <a:ea typeface="나눔고딕코딩"/>
-                <a:cs typeface="나눔고딕코딩"/>
+                <a:latin typeface="D2Coding"/>
+                <a:ea typeface="D2Coding"/>
+                <a:cs typeface="D2Coding"/>
               </a:rPr>
               <a:t>4</a:t>
             </a:r>
@@ -8069,9 +8069,9 @@
                 <a:solidFill>
                   <a:srgbClr val="7A869C"/>
                 </a:solidFill>
-                <a:latin typeface="나눔고딕코딩"/>
-                <a:ea typeface="나눔고딕코딩"/>
-                <a:cs typeface="나눔고딕코딩"/>
+                <a:latin typeface="D2Coding"/>
+                <a:ea typeface="D2Coding"/>
+                <a:cs typeface="D2Coding"/>
               </a:rPr>
               <a:t>5</a:t>
             </a:r>
@@ -8087,9 +8087,9 @@
                 <a:solidFill>
                   <a:srgbClr val="7A869C"/>
                 </a:solidFill>
-                <a:latin typeface="나눔고딕코딩"/>
-                <a:ea typeface="나눔고딕코딩"/>
-                <a:cs typeface="나눔고딕코딩"/>
+                <a:latin typeface="D2Coding"/>
+                <a:ea typeface="D2Coding"/>
+                <a:cs typeface="D2Coding"/>
               </a:rPr>
               <a:t>6</a:t>
             </a:r>
@@ -8128,9 +8128,9 @@
                 <a:solidFill>
                   <a:srgbClr val="E6EAF2"/>
                 </a:solidFill>
-                <a:latin typeface="나눔고딕코딩"/>
-                <a:ea typeface="나눔고딕코딩"/>
-                <a:cs typeface="나눔고딕코딩"/>
+                <a:latin typeface="D2Coding"/>
+                <a:ea typeface="D2Coding"/>
+                <a:cs typeface="D2Coding"/>
               </a:rPr>
               <a:t>SELECT c.name, o.order_id, o.status</a:t>
             </a:r>
@@ -8146,9 +8146,9 @@
                 <a:solidFill>
                   <a:srgbClr val="E6EAF2"/>
                 </a:solidFill>
-                <a:latin typeface="나눔고딕코딩"/>
-                <a:ea typeface="나눔고딕코딩"/>
-                <a:cs typeface="나눔고딕코딩"/>
+                <a:latin typeface="D2Coding"/>
+                <a:ea typeface="D2Coding"/>
+                <a:cs typeface="D2Coding"/>
               </a:rPr>
               <a:t>FROM   customers c</a:t>
             </a:r>
@@ -8164,9 +8164,9 @@
                 <a:solidFill>
                   <a:srgbClr val="E6EAF2"/>
                 </a:solidFill>
-                <a:latin typeface="나눔고딕코딩"/>
-                <a:ea typeface="나눔고딕코딩"/>
-                <a:cs typeface="나눔고딕코딩"/>
+                <a:latin typeface="D2Coding"/>
+                <a:ea typeface="D2Coding"/>
+                <a:cs typeface="D2Coding"/>
               </a:rPr>
               <a:t>LEFT   JOIN orders o ON c.cust_id = o.cust_id</a:t>
             </a:r>
@@ -8182,9 +8182,9 @@
                 <a:solidFill>
                   <a:srgbClr val="E6EAF2"/>
                 </a:solidFill>
-                <a:latin typeface="나눔고딕코딩"/>
-                <a:ea typeface="나눔고딕코딩"/>
-                <a:cs typeface="나눔고딕코딩"/>
+                <a:latin typeface="D2Coding"/>
+                <a:ea typeface="D2Coding"/>
+                <a:cs typeface="D2Coding"/>
               </a:rPr>
               <a:t>WHERE  o.status = '배송완료';</a:t>
             </a:r>
@@ -8200,9 +8200,9 @@
                 <a:solidFill>
                   <a:srgbClr val="E6EAF2"/>
                 </a:solidFill>
-                <a:latin typeface="나눔고딕코딩"/>
-                <a:ea typeface="나눔고딕코딩"/>
-                <a:cs typeface="나눔고딕코딩"/>
+                <a:latin typeface="D2Coding"/>
+                <a:ea typeface="D2Coding"/>
+                <a:cs typeface="D2Coding"/>
               </a:rPr>
               <a:t>--  NULL 행이 조건에서 탈락</a:t>
             </a:r>
@@ -8218,9 +8218,9 @@
                 <a:solidFill>
                   <a:srgbClr val="E6EAF2"/>
                 </a:solidFill>
-                <a:latin typeface="나눔고딕코딩"/>
-                <a:ea typeface="나눔고딕코딩"/>
-                <a:cs typeface="나눔고딕코딩"/>
+                <a:latin typeface="D2Coding"/>
+                <a:ea typeface="D2Coding"/>
+                <a:cs typeface="D2Coding"/>
               </a:rPr>
               <a:t>--  → 배송완료 주문이 있는 고객만 표시</a:t>
             </a:r>
@@ -8964,9 +8964,9 @@
                 <a:solidFill>
                   <a:srgbClr val="7A869C"/>
                 </a:solidFill>
-                <a:latin typeface="나눔고딕코딩"/>
-                <a:ea typeface="나눔고딕코딩"/>
-                <a:cs typeface="나눔고딕코딩"/>
+                <a:latin typeface="D2Coding"/>
+                <a:ea typeface="D2Coding"/>
+                <a:cs typeface="D2Coding"/>
               </a:rPr>
               <a:t>1</a:t>
             </a:r>
@@ -8982,9 +8982,9 @@
                 <a:solidFill>
                   <a:srgbClr val="7A869C"/>
                 </a:solidFill>
-                <a:latin typeface="나눔고딕코딩"/>
-                <a:ea typeface="나눔고딕코딩"/>
-                <a:cs typeface="나눔고딕코딩"/>
+                <a:latin typeface="D2Coding"/>
+                <a:ea typeface="D2Coding"/>
+                <a:cs typeface="D2Coding"/>
               </a:rPr>
               <a:t>2</a:t>
             </a:r>
@@ -9000,9 +9000,9 @@
                 <a:solidFill>
                   <a:srgbClr val="7A869C"/>
                 </a:solidFill>
-                <a:latin typeface="나눔고딕코딩"/>
-                <a:ea typeface="나눔고딕코딩"/>
-                <a:cs typeface="나눔고딕코딩"/>
+                <a:latin typeface="D2Coding"/>
+                <a:ea typeface="D2Coding"/>
+                <a:cs typeface="D2Coding"/>
               </a:rPr>
               <a:t>3</a:t>
             </a:r>
@@ -9018,9 +9018,9 @@
                 <a:solidFill>
                   <a:srgbClr val="7A869C"/>
                 </a:solidFill>
-                <a:latin typeface="나눔고딕코딩"/>
-                <a:ea typeface="나눔고딕코딩"/>
-                <a:cs typeface="나눔고딕코딩"/>
+                <a:latin typeface="D2Coding"/>
+                <a:ea typeface="D2Coding"/>
+                <a:cs typeface="D2Coding"/>
               </a:rPr>
               <a:t>4</a:t>
             </a:r>
@@ -9036,9 +9036,9 @@
                 <a:solidFill>
                   <a:srgbClr val="7A869C"/>
                 </a:solidFill>
-                <a:latin typeface="나눔고딕코딩"/>
-                <a:ea typeface="나눔고딕코딩"/>
-                <a:cs typeface="나눔고딕코딩"/>
+                <a:latin typeface="D2Coding"/>
+                <a:ea typeface="D2Coding"/>
+                <a:cs typeface="D2Coding"/>
               </a:rPr>
               <a:t>5</a:t>
             </a:r>
@@ -9054,9 +9054,9 @@
                 <a:solidFill>
                   <a:srgbClr val="7A869C"/>
                 </a:solidFill>
-                <a:latin typeface="나눔고딕코딩"/>
-                <a:ea typeface="나눔고딕코딩"/>
-                <a:cs typeface="나눔고딕코딩"/>
+                <a:latin typeface="D2Coding"/>
+                <a:ea typeface="D2Coding"/>
+                <a:cs typeface="D2Coding"/>
               </a:rPr>
               <a:t>6</a:t>
             </a:r>
@@ -9072,9 +9072,9 @@
                 <a:solidFill>
                   <a:srgbClr val="7A869C"/>
                 </a:solidFill>
-                <a:latin typeface="나눔고딕코딩"/>
-                <a:ea typeface="나눔고딕코딩"/>
-                <a:cs typeface="나눔고딕코딩"/>
+                <a:latin typeface="D2Coding"/>
+                <a:ea typeface="D2Coding"/>
+                <a:cs typeface="D2Coding"/>
               </a:rPr>
               <a:t>7</a:t>
             </a:r>
@@ -9090,9 +9090,9 @@
                 <a:solidFill>
                   <a:srgbClr val="7A869C"/>
                 </a:solidFill>
-                <a:latin typeface="나눔고딕코딩"/>
-                <a:ea typeface="나눔고딕코딩"/>
-                <a:cs typeface="나눔고딕코딩"/>
+                <a:latin typeface="D2Coding"/>
+                <a:ea typeface="D2Coding"/>
+                <a:cs typeface="D2Coding"/>
               </a:rPr>
               <a:t>8</a:t>
             </a:r>
@@ -9131,9 +9131,9 @@
                 <a:solidFill>
                   <a:srgbClr val="E6EAF2"/>
                 </a:solidFill>
-                <a:latin typeface="나눔고딕코딩"/>
-                <a:ea typeface="나눔고딕코딩"/>
-                <a:cs typeface="나눔고딕코딩"/>
+                <a:latin typeface="D2Coding"/>
+                <a:ea typeface="D2Coding"/>
+                <a:cs typeface="D2Coding"/>
               </a:rPr>
               <a:t>SELECT o.order_id, c.name</a:t>
             </a:r>
@@ -9149,9 +9149,9 @@
                 <a:solidFill>
                   <a:srgbClr val="E6EAF2"/>
                 </a:solidFill>
-                <a:latin typeface="나눔고딕코딩"/>
-                <a:ea typeface="나눔고딕코딩"/>
-                <a:cs typeface="나눔고딕코딩"/>
+                <a:latin typeface="D2Coding"/>
+                <a:ea typeface="D2Coding"/>
+                <a:cs typeface="D2Coding"/>
               </a:rPr>
               <a:t>FROM   orders o</a:t>
             </a:r>
@@ -9167,9 +9167,9 @@
                 <a:solidFill>
                   <a:srgbClr val="E6EAF2"/>
                 </a:solidFill>
-                <a:latin typeface="나눔고딕코딩"/>
-                <a:ea typeface="나눔고딕코딩"/>
-                <a:cs typeface="나눔고딕코딩"/>
+                <a:latin typeface="D2Coding"/>
+                <a:ea typeface="D2Coding"/>
+                <a:cs typeface="D2Coding"/>
               </a:rPr>
               <a:t>RIGHT  JOIN customers c ON o.cust_id = c.cust_id;</a:t>
             </a:r>
@@ -9185,9 +9185,9 @@
                 <a:solidFill>
                   <a:srgbClr val="E6EAF2"/>
                 </a:solidFill>
-                <a:latin typeface="나눔고딕코딩"/>
-                <a:ea typeface="나눔고딕코딩"/>
-                <a:cs typeface="나눔고딕코딩"/>
+                <a:latin typeface="D2Coding"/>
+                <a:ea typeface="D2Coding"/>
+                <a:cs typeface="D2Coding"/>
               </a:rPr>
               <a:t>--  동일한 결과:  FROM customers c LEFT JOIN orders o ON ...</a:t>
             </a:r>
@@ -9203,9 +9203,9 @@
                 <a:solidFill>
                   <a:srgbClr val="E6EAF2"/>
                 </a:solidFill>
-                <a:latin typeface="나눔고딕코딩"/>
-                <a:ea typeface="나눔고딕코딩"/>
-                <a:cs typeface="나눔고딕코딩"/>
+                <a:latin typeface="D2Coding"/>
+                <a:ea typeface="D2Coding"/>
+                <a:cs typeface="D2Coding"/>
               </a:rPr>
               <a:t/>
             </a:r>
@@ -9221,9 +9221,9 @@
                 <a:solidFill>
                   <a:srgbClr val="E6EAF2"/>
                 </a:solidFill>
-                <a:latin typeface="나눔고딕코딩"/>
-                <a:ea typeface="나눔고딕코딩"/>
-                <a:cs typeface="나눔고딕코딩"/>
+                <a:latin typeface="D2Coding"/>
+                <a:ea typeface="D2Coding"/>
+                <a:cs typeface="D2Coding"/>
               </a:rPr>
               <a:t>SELECT c.name, o.order_id FROM customers c LEFT  JOIN orders o ON c.cust_id = o.cust_id</a:t>
             </a:r>
@@ -9239,9 +9239,9 @@
                 <a:solidFill>
                   <a:srgbClr val="E6EAF2"/>
                 </a:solidFill>
-                <a:latin typeface="나눔고딕코딩"/>
-                <a:ea typeface="나눔고딕코딩"/>
-                <a:cs typeface="나눔고딕코딩"/>
+                <a:latin typeface="D2Coding"/>
+                <a:ea typeface="D2Coding"/>
+                <a:cs typeface="D2Coding"/>
               </a:rPr>
               <a:t>UNION</a:t>
             </a:r>
@@ -9257,9 +9257,9 @@
                 <a:solidFill>
                   <a:srgbClr val="E6EAF2"/>
                 </a:solidFill>
-                <a:latin typeface="나눔고딕코딩"/>
-                <a:ea typeface="나눔고딕코딩"/>
-                <a:cs typeface="나눔고딕코딩"/>
+                <a:latin typeface="D2Coding"/>
+                <a:ea typeface="D2Coding"/>
+                <a:cs typeface="D2Coding"/>
               </a:rPr>
               <a:t>SELECT c.name, o.order_id FROM customers c RIGHT JOIN orders o ON c.cust_id = o.cust_id;</a:t>
             </a:r>
@@ -11393,9 +11393,9 @@
                 <a:solidFill>
                   <a:srgbClr val="7A869C"/>
                 </a:solidFill>
-                <a:latin typeface="나눔고딕코딩"/>
-                <a:ea typeface="나눔고딕코딩"/>
-                <a:cs typeface="나눔고딕코딩"/>
+                <a:latin typeface="D2Coding"/>
+                <a:ea typeface="D2Coding"/>
+                <a:cs typeface="D2Coding"/>
               </a:rPr>
               <a:t>1</a:t>
             </a:r>
@@ -11411,9 +11411,9 @@
                 <a:solidFill>
                   <a:srgbClr val="7A869C"/>
                 </a:solidFill>
-                <a:latin typeface="나눔고딕코딩"/>
-                <a:ea typeface="나눔고딕코딩"/>
-                <a:cs typeface="나눔고딕코딩"/>
+                <a:latin typeface="D2Coding"/>
+                <a:ea typeface="D2Coding"/>
+                <a:cs typeface="D2Coding"/>
               </a:rPr>
               <a:t>2</a:t>
             </a:r>
@@ -11429,9 +11429,9 @@
                 <a:solidFill>
                   <a:srgbClr val="7A869C"/>
                 </a:solidFill>
-                <a:latin typeface="나눔고딕코딩"/>
-                <a:ea typeface="나눔고딕코딩"/>
-                <a:cs typeface="나눔고딕코딩"/>
+                <a:latin typeface="D2Coding"/>
+                <a:ea typeface="D2Coding"/>
+                <a:cs typeface="D2Coding"/>
               </a:rPr>
               <a:t>3</a:t>
             </a:r>
@@ -11447,9 +11447,9 @@
                 <a:solidFill>
                   <a:srgbClr val="7A869C"/>
                 </a:solidFill>
-                <a:latin typeface="나눔고딕코딩"/>
-                <a:ea typeface="나눔고딕코딩"/>
-                <a:cs typeface="나눔고딕코딩"/>
+                <a:latin typeface="D2Coding"/>
+                <a:ea typeface="D2Coding"/>
+                <a:cs typeface="D2Coding"/>
               </a:rPr>
               <a:t>4</a:t>
             </a:r>
@@ -11465,9 +11465,9 @@
                 <a:solidFill>
                   <a:srgbClr val="7A869C"/>
                 </a:solidFill>
-                <a:latin typeface="나눔고딕코딩"/>
-                <a:ea typeface="나눔고딕코딩"/>
-                <a:cs typeface="나눔고딕코딩"/>
+                <a:latin typeface="D2Coding"/>
+                <a:ea typeface="D2Coding"/>
+                <a:cs typeface="D2Coding"/>
               </a:rPr>
               <a:t>5</a:t>
             </a:r>
@@ -11483,9 +11483,9 @@
                 <a:solidFill>
                   <a:srgbClr val="7A869C"/>
                 </a:solidFill>
-                <a:latin typeface="나눔고딕코딩"/>
-                <a:ea typeface="나눔고딕코딩"/>
-                <a:cs typeface="나눔고딕코딩"/>
+                <a:latin typeface="D2Coding"/>
+                <a:ea typeface="D2Coding"/>
+                <a:cs typeface="D2Coding"/>
               </a:rPr>
               <a:t>6</a:t>
             </a:r>
@@ -11501,9 +11501,9 @@
                 <a:solidFill>
                   <a:srgbClr val="7A869C"/>
                 </a:solidFill>
-                <a:latin typeface="나눔고딕코딩"/>
-                <a:ea typeface="나눔고딕코딩"/>
-                <a:cs typeface="나눔고딕코딩"/>
+                <a:latin typeface="D2Coding"/>
+                <a:ea typeface="D2Coding"/>
+                <a:cs typeface="D2Coding"/>
               </a:rPr>
               <a:t>7</a:t>
             </a:r>
@@ -11519,9 +11519,9 @@
                 <a:solidFill>
                   <a:srgbClr val="7A869C"/>
                 </a:solidFill>
-                <a:latin typeface="나눔고딕코딩"/>
-                <a:ea typeface="나눔고딕코딩"/>
-                <a:cs typeface="나눔고딕코딩"/>
+                <a:latin typeface="D2Coding"/>
+                <a:ea typeface="D2Coding"/>
+                <a:cs typeface="D2Coding"/>
               </a:rPr>
               <a:t>8</a:t>
             </a:r>
@@ -11537,9 +11537,9 @@
                 <a:solidFill>
                   <a:srgbClr val="7A869C"/>
                 </a:solidFill>
-                <a:latin typeface="나눔고딕코딩"/>
-                <a:ea typeface="나눔고딕코딩"/>
-                <a:cs typeface="나눔고딕코딩"/>
+                <a:latin typeface="D2Coding"/>
+                <a:ea typeface="D2Coding"/>
+                <a:cs typeface="D2Coding"/>
               </a:rPr>
               <a:t>9</a:t>
             </a:r>
@@ -11555,9 +11555,9 @@
                 <a:solidFill>
                   <a:srgbClr val="7A869C"/>
                 </a:solidFill>
-                <a:latin typeface="나눔고딕코딩"/>
-                <a:ea typeface="나눔고딕코딩"/>
-                <a:cs typeface="나눔고딕코딩"/>
+                <a:latin typeface="D2Coding"/>
+                <a:ea typeface="D2Coding"/>
+                <a:cs typeface="D2Coding"/>
               </a:rPr>
               <a:t>10</a:t>
             </a:r>
@@ -11573,9 +11573,9 @@
                 <a:solidFill>
                   <a:srgbClr val="7A869C"/>
                 </a:solidFill>
-                <a:latin typeface="나눔고딕코딩"/>
-                <a:ea typeface="나눔고딕코딩"/>
-                <a:cs typeface="나눔고딕코딩"/>
+                <a:latin typeface="D2Coding"/>
+                <a:ea typeface="D2Coding"/>
+                <a:cs typeface="D2Coding"/>
               </a:rPr>
               <a:t>11</a:t>
             </a:r>
@@ -11614,9 +11614,9 @@
                 <a:solidFill>
                   <a:srgbClr val="E6EAF2"/>
                 </a:solidFill>
-                <a:latin typeface="나눔고딕코딩"/>
-                <a:ea typeface="나눔고딕코딩"/>
-                <a:cs typeface="나눔고딕코딩"/>
+                <a:latin typeface="D2Coding"/>
+                <a:ea typeface="D2Coding"/>
+                <a:cs typeface="D2Coding"/>
               </a:rPr>
               <a:t>SELECT e.name  AS 직원,</a:t>
             </a:r>
@@ -11632,9 +11632,9 @@
                 <a:solidFill>
                   <a:srgbClr val="E6EAF2"/>
                 </a:solidFill>
-                <a:latin typeface="나눔고딕코딩"/>
-                <a:ea typeface="나눔고딕코딩"/>
-                <a:cs typeface="나눔고딕코딩"/>
+                <a:latin typeface="D2Coding"/>
+                <a:ea typeface="D2Coding"/>
+                <a:cs typeface="D2Coding"/>
               </a:rPr>
               <a:t>       e.position AS 직급,</a:t>
             </a:r>
@@ -11650,9 +11650,9 @@
                 <a:solidFill>
                   <a:srgbClr val="E6EAF2"/>
                 </a:solidFill>
-                <a:latin typeface="나눔고딕코딩"/>
-                <a:ea typeface="나눔고딕코딩"/>
-                <a:cs typeface="나눔고딕코딩"/>
+                <a:latin typeface="D2Coding"/>
+                <a:ea typeface="D2Coding"/>
+                <a:cs typeface="D2Coding"/>
               </a:rPr>
               <a:t>       m.name  AS 상급자</a:t>
             </a:r>
@@ -11668,9 +11668,9 @@
                 <a:solidFill>
                   <a:srgbClr val="E6EAF2"/>
                 </a:solidFill>
-                <a:latin typeface="나눔고딕코딩"/>
-                <a:ea typeface="나눔고딕코딩"/>
-                <a:cs typeface="나눔고딕코딩"/>
+                <a:latin typeface="D2Coding"/>
+                <a:ea typeface="D2Coding"/>
+                <a:cs typeface="D2Coding"/>
               </a:rPr>
               <a:t>FROM   employees e</a:t>
             </a:r>
@@ -11686,9 +11686,9 @@
                 <a:solidFill>
                   <a:srgbClr val="E6EAF2"/>
                 </a:solidFill>
-                <a:latin typeface="나눔고딕코딩"/>
-                <a:ea typeface="나눔고딕코딩"/>
-                <a:cs typeface="나눔고딕코딩"/>
+                <a:latin typeface="D2Coding"/>
+                <a:ea typeface="D2Coding"/>
+                <a:cs typeface="D2Coding"/>
               </a:rPr>
               <a:t>JOIN   employees m ON e.manager_id = m.emp_id;</a:t>
             </a:r>
@@ -11704,9 +11704,9 @@
                 <a:solidFill>
                   <a:srgbClr val="E6EAF2"/>
                 </a:solidFill>
-                <a:latin typeface="나눔고딕코딩"/>
-                <a:ea typeface="나눔고딕코딩"/>
-                <a:cs typeface="나눔고딕코딩"/>
+                <a:latin typeface="D2Coding"/>
+                <a:ea typeface="D2Coding"/>
+                <a:cs typeface="D2Coding"/>
               </a:rPr>
               <a:t>/*</a:t>
             </a:r>
@@ -11722,9 +11722,9 @@
                 <a:solidFill>
                   <a:srgbClr val="E6EAF2"/>
                 </a:solidFill>
-                <a:latin typeface="나눔고딕코딩"/>
-                <a:ea typeface="나눔고딕코딩"/>
-                <a:cs typeface="나눔고딕코딩"/>
+                <a:latin typeface="D2Coding"/>
+                <a:ea typeface="D2Coding"/>
+                <a:cs typeface="D2Coding"/>
               </a:rPr>
               <a:t> 이지은 | 대리 | 김성호</a:t>
             </a:r>
@@ -11740,9 +11740,9 @@
                 <a:solidFill>
                   <a:srgbClr val="E6EAF2"/>
                 </a:solidFill>
-                <a:latin typeface="나눔고딕코딩"/>
-                <a:ea typeface="나눔고딕코딩"/>
-                <a:cs typeface="나눔고딕코딩"/>
+                <a:latin typeface="D2Coding"/>
+                <a:ea typeface="D2Coding"/>
+                <a:cs typeface="D2Coding"/>
               </a:rPr>
               <a:t> 박준영 | 사원 | 김성호</a:t>
             </a:r>
@@ -11758,9 +11758,9 @@
                 <a:solidFill>
                   <a:srgbClr val="E6EAF2"/>
                 </a:solidFill>
-                <a:latin typeface="나눔고딕코딩"/>
-                <a:ea typeface="나눔고딕코딩"/>
-                <a:cs typeface="나눔고딕코딩"/>
+                <a:latin typeface="D2Coding"/>
+                <a:ea typeface="D2Coding"/>
+                <a:cs typeface="D2Coding"/>
               </a:rPr>
               <a:t> 정다은 | 사원 | 최민서</a:t>
             </a:r>
@@ -11776,9 +11776,9 @@
                 <a:solidFill>
                   <a:srgbClr val="E6EAF2"/>
                 </a:solidFill>
-                <a:latin typeface="나눔고딕코딩"/>
-                <a:ea typeface="나눔고딕코딩"/>
-                <a:cs typeface="나눔고딕코딩"/>
+                <a:latin typeface="D2Coding"/>
+                <a:ea typeface="D2Coding"/>
+                <a:cs typeface="D2Coding"/>
               </a:rPr>
               <a:t> 윤서준 | 사원 | 강태윤</a:t>
             </a:r>
@@ -11794,9 +11794,9 @@
                 <a:solidFill>
                   <a:srgbClr val="E6EAF2"/>
                 </a:solidFill>
-                <a:latin typeface="나눔고딕코딩"/>
-                <a:ea typeface="나눔고딕코딩"/>
-                <a:cs typeface="나눔고딕코딩"/>
+                <a:latin typeface="D2Coding"/>
+                <a:ea typeface="D2Coding"/>
+                <a:cs typeface="D2Coding"/>
               </a:rPr>
               <a:t>*/</a:t>
             </a:r>
@@ -13641,9 +13641,9 @@
                 <a:solidFill>
                   <a:srgbClr val="7A869C"/>
                 </a:solidFill>
-                <a:latin typeface="나눔고딕코딩"/>
-                <a:ea typeface="나눔고딕코딩"/>
-                <a:cs typeface="나눔고딕코딩"/>
+                <a:latin typeface="D2Coding"/>
+                <a:ea typeface="D2Coding"/>
+                <a:cs typeface="D2Coding"/>
               </a:rPr>
               <a:t>1</a:t>
             </a:r>
@@ -13659,9 +13659,9 @@
                 <a:solidFill>
                   <a:srgbClr val="7A869C"/>
                 </a:solidFill>
-                <a:latin typeface="나눔고딕코딩"/>
-                <a:ea typeface="나눔고딕코딩"/>
-                <a:cs typeface="나눔고딕코딩"/>
+                <a:latin typeface="D2Coding"/>
+                <a:ea typeface="D2Coding"/>
+                <a:cs typeface="D2Coding"/>
               </a:rPr>
               <a:t>2</a:t>
             </a:r>
@@ -13677,9 +13677,9 @@
                 <a:solidFill>
                   <a:srgbClr val="7A869C"/>
                 </a:solidFill>
-                <a:latin typeface="나눔고딕코딩"/>
-                <a:ea typeface="나눔고딕코딩"/>
-                <a:cs typeface="나눔고딕코딩"/>
+                <a:latin typeface="D2Coding"/>
+                <a:ea typeface="D2Coding"/>
+                <a:cs typeface="D2Coding"/>
               </a:rPr>
               <a:t>3</a:t>
             </a:r>
@@ -13695,9 +13695,9 @@
                 <a:solidFill>
                   <a:srgbClr val="7A869C"/>
                 </a:solidFill>
-                <a:latin typeface="나눔고딕코딩"/>
-                <a:ea typeface="나눔고딕코딩"/>
-                <a:cs typeface="나눔고딕코딩"/>
+                <a:latin typeface="D2Coding"/>
+                <a:ea typeface="D2Coding"/>
+                <a:cs typeface="D2Coding"/>
               </a:rPr>
               <a:t>4</a:t>
             </a:r>
@@ -13713,9 +13713,9 @@
                 <a:solidFill>
                   <a:srgbClr val="7A869C"/>
                 </a:solidFill>
-                <a:latin typeface="나눔고딕코딩"/>
-                <a:ea typeface="나눔고딕코딩"/>
-                <a:cs typeface="나눔고딕코딩"/>
+                <a:latin typeface="D2Coding"/>
+                <a:ea typeface="D2Coding"/>
+                <a:cs typeface="D2Coding"/>
               </a:rPr>
               <a:t>5</a:t>
             </a:r>
@@ -13754,9 +13754,9 @@
                 <a:solidFill>
                   <a:srgbClr val="E6EAF2"/>
                 </a:solidFill>
-                <a:latin typeface="나눔고딕코딩"/>
-                <a:ea typeface="나눔고딕코딩"/>
-                <a:cs typeface="나눔고딕코딩"/>
+                <a:latin typeface="D2Coding"/>
+                <a:ea typeface="D2Coding"/>
+                <a:cs typeface="D2Coding"/>
               </a:rPr>
               <a:t>SELECT e.name  AS 직원,</a:t>
             </a:r>
@@ -13772,9 +13772,9 @@
                 <a:solidFill>
                   <a:srgbClr val="E6EAF2"/>
                 </a:solidFill>
-                <a:latin typeface="나눔고딕코딩"/>
-                <a:ea typeface="나눔고딕코딩"/>
-                <a:cs typeface="나눔고딕코딩"/>
+                <a:latin typeface="D2Coding"/>
+                <a:ea typeface="D2Coding"/>
+                <a:cs typeface="D2Coding"/>
               </a:rPr>
               <a:t>       e.position AS 직급,</a:t>
             </a:r>
@@ -13790,9 +13790,9 @@
                 <a:solidFill>
                   <a:srgbClr val="E6EAF2"/>
                 </a:solidFill>
-                <a:latin typeface="나눔고딕코딩"/>
-                <a:ea typeface="나눔고딕코딩"/>
-                <a:cs typeface="나눔고딕코딩"/>
+                <a:latin typeface="D2Coding"/>
+                <a:ea typeface="D2Coding"/>
+                <a:cs typeface="D2Coding"/>
               </a:rPr>
               <a:t>       m.name  AS 상급자</a:t>
             </a:r>
@@ -13808,9 +13808,9 @@
                 <a:solidFill>
                   <a:srgbClr val="E6EAF2"/>
                 </a:solidFill>
-                <a:latin typeface="나눔고딕코딩"/>
-                <a:ea typeface="나눔고딕코딩"/>
-                <a:cs typeface="나눔고딕코딩"/>
+                <a:latin typeface="D2Coding"/>
+                <a:ea typeface="D2Coding"/>
+                <a:cs typeface="D2Coding"/>
               </a:rPr>
               <a:t>FROM   employees e</a:t>
             </a:r>
@@ -13826,9 +13826,9 @@
                 <a:solidFill>
                   <a:srgbClr val="E6EAF2"/>
                 </a:solidFill>
-                <a:latin typeface="나눔고딕코딩"/>
-                <a:ea typeface="나눔고딕코딩"/>
-                <a:cs typeface="나눔고딕코딩"/>
+                <a:latin typeface="D2Coding"/>
+                <a:ea typeface="D2Coding"/>
+                <a:cs typeface="D2Coding"/>
               </a:rPr>
               <a:t>JOIN   employees m ON e.manager_id = m.emp_id;</a:t>
             </a:r>
@@ -14060,9 +14060,9 @@
                 <a:solidFill>
                   <a:srgbClr val="7A869C"/>
                 </a:solidFill>
-                <a:latin typeface="나눔고딕코딩"/>
-                <a:ea typeface="나눔고딕코딩"/>
-                <a:cs typeface="나눔고딕코딩"/>
+                <a:latin typeface="D2Coding"/>
+                <a:ea typeface="D2Coding"/>
+                <a:cs typeface="D2Coding"/>
               </a:rPr>
               <a:t>1</a:t>
             </a:r>
@@ -14078,9 +14078,9 @@
                 <a:solidFill>
                   <a:srgbClr val="7A869C"/>
                 </a:solidFill>
-                <a:latin typeface="나눔고딕코딩"/>
-                <a:ea typeface="나눔고딕코딩"/>
-                <a:cs typeface="나눔고딕코딩"/>
+                <a:latin typeface="D2Coding"/>
+                <a:ea typeface="D2Coding"/>
+                <a:cs typeface="D2Coding"/>
               </a:rPr>
               <a:t>2</a:t>
             </a:r>
@@ -14096,9 +14096,9 @@
                 <a:solidFill>
                   <a:srgbClr val="7A869C"/>
                 </a:solidFill>
-                <a:latin typeface="나눔고딕코딩"/>
-                <a:ea typeface="나눔고딕코딩"/>
-                <a:cs typeface="나눔고딕코딩"/>
+                <a:latin typeface="D2Coding"/>
+                <a:ea typeface="D2Coding"/>
+                <a:cs typeface="D2Coding"/>
               </a:rPr>
               <a:t>3</a:t>
             </a:r>
@@ -14114,9 +14114,9 @@
                 <a:solidFill>
                   <a:srgbClr val="7A869C"/>
                 </a:solidFill>
-                <a:latin typeface="나눔고딕코딩"/>
-                <a:ea typeface="나눔고딕코딩"/>
-                <a:cs typeface="나눔고딕코딩"/>
+                <a:latin typeface="D2Coding"/>
+                <a:ea typeface="D2Coding"/>
+                <a:cs typeface="D2Coding"/>
               </a:rPr>
               <a:t>4</a:t>
             </a:r>
@@ -14132,9 +14132,9 @@
                 <a:solidFill>
                   <a:srgbClr val="7A869C"/>
                 </a:solidFill>
-                <a:latin typeface="나눔고딕코딩"/>
-                <a:ea typeface="나눔고딕코딩"/>
-                <a:cs typeface="나눔고딕코딩"/>
+                <a:latin typeface="D2Coding"/>
+                <a:ea typeface="D2Coding"/>
+                <a:cs typeface="D2Coding"/>
               </a:rPr>
               <a:t>5</a:t>
             </a:r>
@@ -14173,9 +14173,9 @@
                 <a:solidFill>
                   <a:srgbClr val="E6EAF2"/>
                 </a:solidFill>
-                <a:latin typeface="나눔고딕코딩"/>
-                <a:ea typeface="나눔고딕코딩"/>
-                <a:cs typeface="나눔고딕코딩"/>
+                <a:latin typeface="D2Coding"/>
+                <a:ea typeface="D2Coding"/>
+                <a:cs typeface="D2Coding"/>
               </a:rPr>
               <a:t>SELECT e.name AS 직원, m.name AS 상급자</a:t>
             </a:r>
@@ -14191,9 +14191,9 @@
                 <a:solidFill>
                   <a:srgbClr val="E6EAF2"/>
                 </a:solidFill>
-                <a:latin typeface="나눔고딕코딩"/>
-                <a:ea typeface="나눔고딕코딩"/>
-                <a:cs typeface="나눔고딕코딩"/>
+                <a:latin typeface="D2Coding"/>
+                <a:ea typeface="D2Coding"/>
+                <a:cs typeface="D2Coding"/>
               </a:rPr>
               <a:t>FROM   employees e</a:t>
             </a:r>
@@ -14209,9 +14209,9 @@
                 <a:solidFill>
                   <a:srgbClr val="E6EAF2"/>
                 </a:solidFill>
-                <a:latin typeface="나눔고딕코딩"/>
-                <a:ea typeface="나눔고딕코딩"/>
-                <a:cs typeface="나눔고딕코딩"/>
+                <a:latin typeface="D2Coding"/>
+                <a:ea typeface="D2Coding"/>
+                <a:cs typeface="D2Coding"/>
               </a:rPr>
               <a:t>LEFT   JOIN employees m ON e.manager_id = m.emp_id;</a:t>
             </a:r>
@@ -14227,9 +14227,9 @@
                 <a:solidFill>
                   <a:srgbClr val="E6EAF2"/>
                 </a:solidFill>
-                <a:latin typeface="나눔고딕코딩"/>
-                <a:ea typeface="나눔고딕코딩"/>
-                <a:cs typeface="나눔고딕코딩"/>
+                <a:latin typeface="D2Coding"/>
+                <a:ea typeface="D2Coding"/>
+                <a:cs typeface="D2Coding"/>
               </a:rPr>
               <a:t>--  8행 — 김성호·최민서·강태윤·조하늘의</a:t>
             </a:r>
@@ -14245,9 +14245,9 @@
                 <a:solidFill>
                   <a:srgbClr val="E6EAF2"/>
                 </a:solidFill>
-                <a:latin typeface="나눔고딕코딩"/>
-                <a:ea typeface="나눔고딕코딩"/>
-                <a:cs typeface="나눔고딕코딩"/>
+                <a:latin typeface="D2Coding"/>
+                <a:ea typeface="D2Coding"/>
+                <a:cs typeface="D2Coding"/>
               </a:rPr>
               <a:t>--  상급자는 NULL</a:t>
             </a:r>
@@ -14912,9 +14912,9 @@
                 <a:solidFill>
                   <a:srgbClr val="7A869C"/>
                 </a:solidFill>
-                <a:latin typeface="나눔고딕코딩"/>
-                <a:ea typeface="나눔고딕코딩"/>
-                <a:cs typeface="나눔고딕코딩"/>
+                <a:latin typeface="D2Coding"/>
+                <a:ea typeface="D2Coding"/>
+                <a:cs typeface="D2Coding"/>
               </a:rPr>
               <a:t>1</a:t>
             </a:r>
@@ -14930,9 +14930,9 @@
                 <a:solidFill>
                   <a:srgbClr val="7A869C"/>
                 </a:solidFill>
-                <a:latin typeface="나눔고딕코딩"/>
-                <a:ea typeface="나눔고딕코딩"/>
-                <a:cs typeface="나눔고딕코딩"/>
+                <a:latin typeface="D2Coding"/>
+                <a:ea typeface="D2Coding"/>
+                <a:cs typeface="D2Coding"/>
               </a:rPr>
               <a:t>2</a:t>
             </a:r>
@@ -14948,9 +14948,9 @@
                 <a:solidFill>
                   <a:srgbClr val="7A869C"/>
                 </a:solidFill>
-                <a:latin typeface="나눔고딕코딩"/>
-                <a:ea typeface="나눔고딕코딩"/>
-                <a:cs typeface="나눔고딕코딩"/>
+                <a:latin typeface="D2Coding"/>
+                <a:ea typeface="D2Coding"/>
+                <a:cs typeface="D2Coding"/>
               </a:rPr>
               <a:t>3</a:t>
             </a:r>
@@ -14966,9 +14966,9 @@
                 <a:solidFill>
                   <a:srgbClr val="7A869C"/>
                 </a:solidFill>
-                <a:latin typeface="나눔고딕코딩"/>
-                <a:ea typeface="나눔고딕코딩"/>
-                <a:cs typeface="나눔고딕코딩"/>
+                <a:latin typeface="D2Coding"/>
+                <a:ea typeface="D2Coding"/>
+                <a:cs typeface="D2Coding"/>
               </a:rPr>
               <a:t>4</a:t>
             </a:r>
@@ -15007,9 +15007,9 @@
                 <a:solidFill>
                   <a:srgbClr val="E6EAF2"/>
                 </a:solidFill>
-                <a:latin typeface="나눔고딕코딩"/>
-                <a:ea typeface="나눔고딕코딩"/>
-                <a:cs typeface="나눔고딕코딩"/>
+                <a:latin typeface="D2Coding"/>
+                <a:ea typeface="D2Coding"/>
+                <a:cs typeface="D2Coding"/>
               </a:rPr>
               <a:t>SELECT c.name AS 고객, p.name AS 상품</a:t>
             </a:r>
@@ -15025,9 +15025,9 @@
                 <a:solidFill>
                   <a:srgbClr val="E6EAF2"/>
                 </a:solidFill>
-                <a:latin typeface="나눔고딕코딩"/>
-                <a:ea typeface="나눔고딕코딩"/>
-                <a:cs typeface="나눔고딕코딩"/>
+                <a:latin typeface="D2Coding"/>
+                <a:ea typeface="D2Coding"/>
+                <a:cs typeface="D2Coding"/>
               </a:rPr>
               <a:t>FROM   customers c CROSS JOIN products p;</a:t>
             </a:r>
@@ -15043,9 +15043,9 @@
                 <a:solidFill>
                   <a:srgbClr val="E6EAF2"/>
                 </a:solidFill>
-                <a:latin typeface="나눔고딕코딩"/>
-                <a:ea typeface="나눔고딕코딩"/>
-                <a:cs typeface="나눔고딕코딩"/>
+                <a:latin typeface="D2Coding"/>
+                <a:ea typeface="D2Coding"/>
+                <a:cs typeface="D2Coding"/>
               </a:rPr>
               <a:t>--  추천 후보 매트릭스처럼 "모든 조합"이</a:t>
             </a:r>
@@ -15061,9 +15061,9 @@
                 <a:solidFill>
                   <a:srgbClr val="E6EAF2"/>
                 </a:solidFill>
-                <a:latin typeface="나눔고딕코딩"/>
-                <a:ea typeface="나눔고딕코딩"/>
-                <a:cs typeface="나눔고딕코딩"/>
+                <a:latin typeface="D2Coding"/>
+                <a:ea typeface="D2Coding"/>
+                <a:cs typeface="D2Coding"/>
               </a:rPr>
               <a:t>--  필요할 때만 의도적으로 사용</a:t>
             </a:r>
@@ -15295,9 +15295,9 @@
                 <a:solidFill>
                   <a:srgbClr val="7A869C"/>
                 </a:solidFill>
-                <a:latin typeface="나눔고딕코딩"/>
-                <a:ea typeface="나눔고딕코딩"/>
-                <a:cs typeface="나눔고딕코딩"/>
+                <a:latin typeface="D2Coding"/>
+                <a:ea typeface="D2Coding"/>
+                <a:cs typeface="D2Coding"/>
               </a:rPr>
               <a:t>1</a:t>
             </a:r>
@@ -15313,9 +15313,9 @@
                 <a:solidFill>
                   <a:srgbClr val="7A869C"/>
                 </a:solidFill>
-                <a:latin typeface="나눔고딕코딩"/>
-                <a:ea typeface="나눔고딕코딩"/>
-                <a:cs typeface="나눔고딕코딩"/>
+                <a:latin typeface="D2Coding"/>
+                <a:ea typeface="D2Coding"/>
+                <a:cs typeface="D2Coding"/>
               </a:rPr>
               <a:t>2</a:t>
             </a:r>
@@ -15331,9 +15331,9 @@
                 <a:solidFill>
                   <a:srgbClr val="7A869C"/>
                 </a:solidFill>
-                <a:latin typeface="나눔고딕코딩"/>
-                <a:ea typeface="나눔고딕코딩"/>
-                <a:cs typeface="나눔고딕코딩"/>
+                <a:latin typeface="D2Coding"/>
+                <a:ea typeface="D2Coding"/>
+                <a:cs typeface="D2Coding"/>
               </a:rPr>
               <a:t>3</a:t>
             </a:r>
@@ -15349,9 +15349,9 @@
                 <a:solidFill>
                   <a:srgbClr val="7A869C"/>
                 </a:solidFill>
-                <a:latin typeface="나눔고딕코딩"/>
-                <a:ea typeface="나눔고딕코딩"/>
-                <a:cs typeface="나눔고딕코딩"/>
+                <a:latin typeface="D2Coding"/>
+                <a:ea typeface="D2Coding"/>
+                <a:cs typeface="D2Coding"/>
               </a:rPr>
               <a:t>4</a:t>
             </a:r>
@@ -15390,9 +15390,9 @@
                 <a:solidFill>
                   <a:srgbClr val="E6EAF2"/>
                 </a:solidFill>
-                <a:latin typeface="나눔고딕코딩"/>
-                <a:ea typeface="나눔고딕코딩"/>
-                <a:cs typeface="나눔고딕코딩"/>
+                <a:latin typeface="D2Coding"/>
+                <a:ea typeface="D2Coding"/>
+                <a:cs typeface="D2Coding"/>
               </a:rPr>
               <a:t>SELECT o.order_id, c.name</a:t>
             </a:r>
@@ -15408,9 +15408,9 @@
                 <a:solidFill>
                   <a:srgbClr val="E6EAF2"/>
                 </a:solidFill>
-                <a:latin typeface="나눔고딕코딩"/>
-                <a:ea typeface="나눔고딕코딩"/>
-                <a:cs typeface="나눔고딕코딩"/>
+                <a:latin typeface="D2Coding"/>
+                <a:ea typeface="D2Coding"/>
+                <a:cs typeface="D2Coding"/>
               </a:rPr>
               <a:t>FROM   orders o, customers c;</a:t>
             </a:r>
@@ -15426,9 +15426,9 @@
                 <a:solidFill>
                   <a:srgbClr val="E6EAF2"/>
                 </a:solidFill>
-                <a:latin typeface="나눔고딕코딩"/>
-                <a:ea typeface="나눔고딕코딩"/>
-                <a:cs typeface="나눔고딕코딩"/>
+                <a:latin typeface="D2Coding"/>
+                <a:ea typeface="D2Coding"/>
+                <a:cs typeface="D2Coding"/>
               </a:rPr>
               <a:t>--  올바른 질의는 WHERE o.cust_id = c.cust_id</a:t>
             </a:r>
@@ -15444,9 +15444,9 @@
                 <a:solidFill>
                   <a:srgbClr val="E6EAF2"/>
                 </a:solidFill>
-                <a:latin typeface="나눔고딕코딩"/>
-                <a:ea typeface="나눔고딕코딩"/>
-                <a:cs typeface="나눔고딕코딩"/>
+                <a:latin typeface="D2Coding"/>
+                <a:ea typeface="D2Coding"/>
+                <a:cs typeface="D2Coding"/>
               </a:rPr>
               <a:t>--  조건이 필요</a:t>
             </a:r>
@@ -27540,9 +27540,9 @@
                 <a:solidFill>
                   <a:srgbClr val="7A869C"/>
                 </a:solidFill>
-                <a:latin typeface="나눔고딕코딩"/>
-                <a:ea typeface="나눔고딕코딩"/>
-                <a:cs typeface="나눔고딕코딩"/>
+                <a:latin typeface="D2Coding"/>
+                <a:ea typeface="D2Coding"/>
+                <a:cs typeface="D2Coding"/>
               </a:rPr>
               <a:t>1</a:t>
             </a:r>
@@ -27558,9 +27558,9 @@
                 <a:solidFill>
                   <a:srgbClr val="7A869C"/>
                 </a:solidFill>
-                <a:latin typeface="나눔고딕코딩"/>
-                <a:ea typeface="나눔고딕코딩"/>
-                <a:cs typeface="나눔고딕코딩"/>
+                <a:latin typeface="D2Coding"/>
+                <a:ea typeface="D2Coding"/>
+                <a:cs typeface="D2Coding"/>
               </a:rPr>
               <a:t>2</a:t>
             </a:r>
@@ -27576,9 +27576,9 @@
                 <a:solidFill>
                   <a:srgbClr val="7A869C"/>
                 </a:solidFill>
-                <a:latin typeface="나눔고딕코딩"/>
-                <a:ea typeface="나눔고딕코딩"/>
-                <a:cs typeface="나눔고딕코딩"/>
+                <a:latin typeface="D2Coding"/>
+                <a:ea typeface="D2Coding"/>
+                <a:cs typeface="D2Coding"/>
               </a:rPr>
               <a:t>3</a:t>
             </a:r>
@@ -27594,9 +27594,9 @@
                 <a:solidFill>
                   <a:srgbClr val="7A869C"/>
                 </a:solidFill>
-                <a:latin typeface="나눔고딕코딩"/>
-                <a:ea typeface="나눔고딕코딩"/>
-                <a:cs typeface="나눔고딕코딩"/>
+                <a:latin typeface="D2Coding"/>
+                <a:ea typeface="D2Coding"/>
+                <a:cs typeface="D2Coding"/>
               </a:rPr>
               <a:t>4</a:t>
             </a:r>
@@ -27612,9 +27612,9 @@
                 <a:solidFill>
                   <a:srgbClr val="7A869C"/>
                 </a:solidFill>
-                <a:latin typeface="나눔고딕코딩"/>
-                <a:ea typeface="나눔고딕코딩"/>
-                <a:cs typeface="나눔고딕코딩"/>
+                <a:latin typeface="D2Coding"/>
+                <a:ea typeface="D2Coding"/>
+                <a:cs typeface="D2Coding"/>
               </a:rPr>
               <a:t>5</a:t>
             </a:r>
@@ -27630,9 +27630,9 @@
                 <a:solidFill>
                   <a:srgbClr val="7A869C"/>
                 </a:solidFill>
-                <a:latin typeface="나눔고딕코딩"/>
-                <a:ea typeface="나눔고딕코딩"/>
-                <a:cs typeface="나눔고딕코딩"/>
+                <a:latin typeface="D2Coding"/>
+                <a:ea typeface="D2Coding"/>
+                <a:cs typeface="D2Coding"/>
               </a:rPr>
               <a:t>6</a:t>
             </a:r>
@@ -27648,9 +27648,9 @@
                 <a:solidFill>
                   <a:srgbClr val="7A869C"/>
                 </a:solidFill>
-                <a:latin typeface="나눔고딕코딩"/>
-                <a:ea typeface="나눔고딕코딩"/>
-                <a:cs typeface="나눔고딕코딩"/>
+                <a:latin typeface="D2Coding"/>
+                <a:ea typeface="D2Coding"/>
+                <a:cs typeface="D2Coding"/>
               </a:rPr>
               <a:t>7</a:t>
             </a:r>
@@ -27689,9 +27689,9 @@
                 <a:solidFill>
                   <a:srgbClr val="E6EAF2"/>
                 </a:solidFill>
-                <a:latin typeface="나눔고딕코딩"/>
-                <a:ea typeface="나눔고딕코딩"/>
-                <a:cs typeface="나눔고딕코딩"/>
+                <a:latin typeface="D2Coding"/>
+                <a:ea typeface="D2Coding"/>
+                <a:cs typeface="D2Coding"/>
               </a:rPr>
               <a:t>SELECT order_id, cust_id, order_date FROM orders;</a:t>
             </a:r>
@@ -27707,9 +27707,9 @@
                 <a:solidFill>
                   <a:srgbClr val="E6EAF2"/>
                 </a:solidFill>
-                <a:latin typeface="나눔고딕코딩"/>
-                <a:ea typeface="나눔고딕코딩"/>
-                <a:cs typeface="나눔고딕코딩"/>
+                <a:latin typeface="D2Coding"/>
+                <a:ea typeface="D2Coding"/>
+                <a:cs typeface="D2Coding"/>
               </a:rPr>
               <a:t>--  1001 | C001 | 2026-01-10     ← C001이 누구인지 알 수 없다</a:t>
             </a:r>
@@ -27725,9 +27725,9 @@
                 <a:solidFill>
                   <a:srgbClr val="E6EAF2"/>
                 </a:solidFill>
-                <a:latin typeface="나눔고딕코딩"/>
-                <a:ea typeface="나눔고딕코딩"/>
-                <a:cs typeface="나눔고딕코딩"/>
+                <a:latin typeface="D2Coding"/>
+                <a:ea typeface="D2Coding"/>
+                <a:cs typeface="D2Coding"/>
               </a:rPr>
               <a:t/>
             </a:r>
@@ -27743,9 +27743,9 @@
                 <a:solidFill>
                   <a:srgbClr val="E6EAF2"/>
                 </a:solidFill>
-                <a:latin typeface="나눔고딕코딩"/>
-                <a:ea typeface="나눔고딕코딩"/>
-                <a:cs typeface="나눔고딕코딩"/>
+                <a:latin typeface="D2Coding"/>
+                <a:ea typeface="D2Coding"/>
+                <a:cs typeface="D2Coding"/>
               </a:rPr>
               <a:t>SELECT o.order_id, c.name, o.order_date</a:t>
             </a:r>
@@ -27761,9 +27761,9 @@
                 <a:solidFill>
                   <a:srgbClr val="E6EAF2"/>
                 </a:solidFill>
-                <a:latin typeface="나눔고딕코딩"/>
-                <a:ea typeface="나눔고딕코딩"/>
-                <a:cs typeface="나눔고딕코딩"/>
+                <a:latin typeface="D2Coding"/>
+                <a:ea typeface="D2Coding"/>
+                <a:cs typeface="D2Coding"/>
               </a:rPr>
               <a:t>FROM   orders o</a:t>
             </a:r>
@@ -27779,9 +27779,9 @@
                 <a:solidFill>
                   <a:srgbClr val="E6EAF2"/>
                 </a:solidFill>
-                <a:latin typeface="나눔고딕코딩"/>
-                <a:ea typeface="나눔고딕코딩"/>
-                <a:cs typeface="나눔고딕코딩"/>
+                <a:latin typeface="D2Coding"/>
+                <a:ea typeface="D2Coding"/>
+                <a:cs typeface="D2Coding"/>
               </a:rPr>
               <a:t>JOIN   customers c ON o.cust_id = c.cust_id;</a:t>
             </a:r>
@@ -27797,9 +27797,9 @@
                 <a:solidFill>
                   <a:srgbClr val="E6EAF2"/>
                 </a:solidFill>
-                <a:latin typeface="나눔고딕코딩"/>
-                <a:ea typeface="나눔고딕코딩"/>
-                <a:cs typeface="나눔고딕코딩"/>
+                <a:latin typeface="D2Coding"/>
+                <a:ea typeface="D2Coding"/>
+                <a:cs typeface="D2Coding"/>
               </a:rPr>
               <a:t>--  1001 | 한가람 | 2026-01-10</a:t>
             </a:r>
@@ -31318,9 +31318,9 @@
                 <a:solidFill>
                   <a:srgbClr val="7A869C"/>
                 </a:solidFill>
-                <a:latin typeface="나눔고딕코딩"/>
-                <a:ea typeface="나눔고딕코딩"/>
-                <a:cs typeface="나눔고딕코딩"/>
+                <a:latin typeface="D2Coding"/>
+                <a:ea typeface="D2Coding"/>
+                <a:cs typeface="D2Coding"/>
               </a:rPr>
               <a:t>1</a:t>
             </a:r>
@@ -31336,9 +31336,9 @@
                 <a:solidFill>
                   <a:srgbClr val="7A869C"/>
                 </a:solidFill>
-                <a:latin typeface="나눔고딕코딩"/>
-                <a:ea typeface="나눔고딕코딩"/>
-                <a:cs typeface="나눔고딕코딩"/>
+                <a:latin typeface="D2Coding"/>
+                <a:ea typeface="D2Coding"/>
+                <a:cs typeface="D2Coding"/>
               </a:rPr>
               <a:t>2</a:t>
             </a:r>
@@ -31354,9 +31354,9 @@
                 <a:solidFill>
                   <a:srgbClr val="7A869C"/>
                 </a:solidFill>
-                <a:latin typeface="나눔고딕코딩"/>
-                <a:ea typeface="나눔고딕코딩"/>
-                <a:cs typeface="나눔고딕코딩"/>
+                <a:latin typeface="D2Coding"/>
+                <a:ea typeface="D2Coding"/>
+                <a:cs typeface="D2Coding"/>
               </a:rPr>
               <a:t>3</a:t>
             </a:r>
@@ -31372,9 +31372,9 @@
                 <a:solidFill>
                   <a:srgbClr val="7A869C"/>
                 </a:solidFill>
-                <a:latin typeface="나눔고딕코딩"/>
-                <a:ea typeface="나눔고딕코딩"/>
-                <a:cs typeface="나눔고딕코딩"/>
+                <a:latin typeface="D2Coding"/>
+                <a:ea typeface="D2Coding"/>
+                <a:cs typeface="D2Coding"/>
               </a:rPr>
               <a:t>4</a:t>
             </a:r>
@@ -31413,9 +31413,9 @@
                 <a:solidFill>
                   <a:srgbClr val="E6EAF2"/>
                 </a:solidFill>
-                <a:latin typeface="나눔고딕코딩"/>
-                <a:ea typeface="나눔고딕코딩"/>
-                <a:cs typeface="나눔고딕코딩"/>
+                <a:latin typeface="D2Coding"/>
+                <a:ea typeface="D2Coding"/>
+                <a:cs typeface="D2Coding"/>
               </a:rPr>
               <a:t>SELECT o.order_id, c.name, o.status</a:t>
             </a:r>
@@ -31431,9 +31431,9 @@
                 <a:solidFill>
                   <a:srgbClr val="E6EAF2"/>
                 </a:solidFill>
-                <a:latin typeface="나눔고딕코딩"/>
-                <a:ea typeface="나눔고딕코딩"/>
-                <a:cs typeface="나눔고딕코딩"/>
+                <a:latin typeface="D2Coding"/>
+                <a:ea typeface="D2Coding"/>
+                <a:cs typeface="D2Coding"/>
               </a:rPr>
               <a:t>FROM   orders    o</a:t>
             </a:r>
@@ -31449,9 +31449,9 @@
                 <a:solidFill>
                   <a:srgbClr val="E6EAF2"/>
                 </a:solidFill>
-                <a:latin typeface="나눔고딕코딩"/>
-                <a:ea typeface="나눔고딕코딩"/>
-                <a:cs typeface="나눔고딕코딩"/>
+                <a:latin typeface="D2Coding"/>
+                <a:ea typeface="D2Coding"/>
+                <a:cs typeface="D2Coding"/>
               </a:rPr>
               <a:t>INNER  JOIN customers c ON o.cust_id = c.cust_id;</a:t>
             </a:r>
@@ -31467,9 +31467,9 @@
                 <a:solidFill>
                   <a:srgbClr val="E6EAF2"/>
                 </a:solidFill>
-                <a:latin typeface="나눔고딕코딩"/>
-                <a:ea typeface="나눔고딕코딩"/>
-                <a:cs typeface="나눔고딕코딩"/>
+                <a:latin typeface="D2Coding"/>
+                <a:ea typeface="D2Coding"/>
+                <a:cs typeface="D2Coding"/>
               </a:rPr>
               <a:t>--  INNER 키워드는 생략 가능 → JOIN 만 써도 INNER JOIN</a:t>
             </a:r>
@@ -31701,9 +31701,9 @@
                 <a:solidFill>
                   <a:srgbClr val="7A869C"/>
                 </a:solidFill>
-                <a:latin typeface="나눔고딕코딩"/>
-                <a:ea typeface="나눔고딕코딩"/>
-                <a:cs typeface="나눔고딕코딩"/>
+                <a:latin typeface="D2Coding"/>
+                <a:ea typeface="D2Coding"/>
+                <a:cs typeface="D2Coding"/>
               </a:rPr>
               <a:t>1</a:t>
             </a:r>
@@ -31719,9 +31719,9 @@
                 <a:solidFill>
                   <a:srgbClr val="7A869C"/>
                 </a:solidFill>
-                <a:latin typeface="나눔고딕코딩"/>
-                <a:ea typeface="나눔고딕코딩"/>
-                <a:cs typeface="나눔고딕코딩"/>
+                <a:latin typeface="D2Coding"/>
+                <a:ea typeface="D2Coding"/>
+                <a:cs typeface="D2Coding"/>
               </a:rPr>
               <a:t>2</a:t>
             </a:r>
@@ -31737,9 +31737,9 @@
                 <a:solidFill>
                   <a:srgbClr val="7A869C"/>
                 </a:solidFill>
-                <a:latin typeface="나눔고딕코딩"/>
-                <a:ea typeface="나눔고딕코딩"/>
-                <a:cs typeface="나눔고딕코딩"/>
+                <a:latin typeface="D2Coding"/>
+                <a:ea typeface="D2Coding"/>
+                <a:cs typeface="D2Coding"/>
               </a:rPr>
               <a:t>3</a:t>
             </a:r>
@@ -31778,9 +31778,9 @@
                 <a:solidFill>
                   <a:srgbClr val="E6EAF2"/>
                 </a:solidFill>
-                <a:latin typeface="나눔고딕코딩"/>
-                <a:ea typeface="나눔고딕코딩"/>
-                <a:cs typeface="나눔고딕코딩"/>
+                <a:latin typeface="D2Coding"/>
+                <a:ea typeface="D2Coding"/>
+                <a:cs typeface="D2Coding"/>
               </a:rPr>
               <a:t>SELECT o.order_id, c.name, o.status</a:t>
             </a:r>
@@ -31796,9 +31796,9 @@
                 <a:solidFill>
                   <a:srgbClr val="E6EAF2"/>
                 </a:solidFill>
-                <a:latin typeface="나눔고딕코딩"/>
-                <a:ea typeface="나눔고딕코딩"/>
-                <a:cs typeface="나눔고딕코딩"/>
+                <a:latin typeface="D2Coding"/>
+                <a:ea typeface="D2Coding"/>
+                <a:cs typeface="D2Coding"/>
               </a:rPr>
               <a:t>FROM   orders o, customers c</a:t>
             </a:r>
@@ -31814,9 +31814,9 @@
                 <a:solidFill>
                   <a:srgbClr val="E6EAF2"/>
                 </a:solidFill>
-                <a:latin typeface="나눔고딕코딩"/>
-                <a:ea typeface="나눔고딕코딩"/>
-                <a:cs typeface="나눔고딕코딩"/>
+                <a:latin typeface="D2Coding"/>
+                <a:ea typeface="D2Coding"/>
+                <a:cs typeface="D2Coding"/>
               </a:rPr>
               <a:t>WHERE  o.cust_id = c.cust_id;</a:t>
             </a:r>
@@ -32518,9 +32518,9 @@
                 <a:solidFill>
                   <a:srgbClr val="E6EAF2"/>
                 </a:solidFill>
-                <a:latin typeface="나눔고딕코딩"/>
-                <a:ea typeface="나눔고딕코딩"/>
-                <a:cs typeface="나눔고딕코딩"/>
+                <a:latin typeface="D2Coding"/>
+                <a:ea typeface="D2Coding"/>
+                <a:cs typeface="D2Coding"/>
               </a:rPr>
               <a:t>INNER JOIN customers c ON o.cust_id = c.cust_id</a:t>
             </a:r>
@@ -32737,9 +32737,9 @@
                 <a:solidFill>
                   <a:srgbClr val="E6EAF2"/>
                 </a:solidFill>
-                <a:latin typeface="나눔고딕코딩"/>
-                <a:ea typeface="나눔고딕코딩"/>
-                <a:cs typeface="나눔고딕코딩"/>
+                <a:latin typeface="D2Coding"/>
+                <a:ea typeface="D2Coding"/>
+                <a:cs typeface="D2Coding"/>
               </a:rPr>
               <a:t>JOIN customers c ON o.cust_id = c.cust_id</a:t>
             </a:r>
@@ -32956,9 +32956,9 @@
                 <a:solidFill>
                   <a:srgbClr val="E6EAF2"/>
                 </a:solidFill>
-                <a:latin typeface="나눔고딕코딩"/>
-                <a:ea typeface="나눔고딕코딩"/>
-                <a:cs typeface="나눔고딕코딩"/>
+                <a:latin typeface="D2Coding"/>
+                <a:ea typeface="D2Coding"/>
+                <a:cs typeface="D2Coding"/>
               </a:rPr>
               <a:t>FROM orders o JOIN customers c USING (cust_id)</a:t>
             </a:r>
@@ -33175,9 +33175,9 @@
                 <a:solidFill>
                   <a:srgbClr val="E6EAF2"/>
                 </a:solidFill>
-                <a:latin typeface="나눔고딕코딩"/>
-                <a:ea typeface="나눔고딕코딩"/>
-                <a:cs typeface="나눔고딕코딩"/>
+                <a:latin typeface="D2Coding"/>
+                <a:ea typeface="D2Coding"/>
+                <a:cs typeface="D2Coding"/>
               </a:rPr>
               <a:t>SELECT * FROM orders NATURAL JOIN customers;</a:t>
             </a:r>
@@ -34082,9 +34082,9 @@
                 <a:solidFill>
                   <a:srgbClr val="7A869C"/>
                 </a:solidFill>
-                <a:latin typeface="나눔고딕코딩"/>
-                <a:ea typeface="나눔고딕코딩"/>
-                <a:cs typeface="나눔고딕코딩"/>
+                <a:latin typeface="D2Coding"/>
+                <a:ea typeface="D2Coding"/>
+                <a:cs typeface="D2Coding"/>
               </a:rPr>
               <a:t>1</a:t>
             </a:r>
@@ -34100,9 +34100,9 @@
                 <a:solidFill>
                   <a:srgbClr val="7A869C"/>
                 </a:solidFill>
-                <a:latin typeface="나눔고딕코딩"/>
-                <a:ea typeface="나눔고딕코딩"/>
-                <a:cs typeface="나눔고딕코딩"/>
+                <a:latin typeface="D2Coding"/>
+                <a:ea typeface="D2Coding"/>
+                <a:cs typeface="D2Coding"/>
               </a:rPr>
               <a:t>2</a:t>
             </a:r>
@@ -34118,9 +34118,9 @@
                 <a:solidFill>
                   <a:srgbClr val="7A869C"/>
                 </a:solidFill>
-                <a:latin typeface="나눔고딕코딩"/>
-                <a:ea typeface="나눔고딕코딩"/>
-                <a:cs typeface="나눔고딕코딩"/>
+                <a:latin typeface="D2Coding"/>
+                <a:ea typeface="D2Coding"/>
+                <a:cs typeface="D2Coding"/>
               </a:rPr>
               <a:t>3</a:t>
             </a:r>
@@ -34136,9 +34136,9 @@
                 <a:solidFill>
                   <a:srgbClr val="7A869C"/>
                 </a:solidFill>
-                <a:latin typeface="나눔고딕코딩"/>
-                <a:ea typeface="나눔고딕코딩"/>
-                <a:cs typeface="나눔고딕코딩"/>
+                <a:latin typeface="D2Coding"/>
+                <a:ea typeface="D2Coding"/>
+                <a:cs typeface="D2Coding"/>
               </a:rPr>
               <a:t>4</a:t>
             </a:r>
@@ -34154,9 +34154,9 @@
                 <a:solidFill>
                   <a:srgbClr val="7A869C"/>
                 </a:solidFill>
-                <a:latin typeface="나눔고딕코딩"/>
-                <a:ea typeface="나눔고딕코딩"/>
-                <a:cs typeface="나눔고딕코딩"/>
+                <a:latin typeface="D2Coding"/>
+                <a:ea typeface="D2Coding"/>
+                <a:cs typeface="D2Coding"/>
               </a:rPr>
               <a:t>5</a:t>
             </a:r>
@@ -34172,9 +34172,9 @@
                 <a:solidFill>
                   <a:srgbClr val="7A869C"/>
                 </a:solidFill>
-                <a:latin typeface="나눔고딕코딩"/>
-                <a:ea typeface="나눔고딕코딩"/>
-                <a:cs typeface="나눔고딕코딩"/>
+                <a:latin typeface="D2Coding"/>
+                <a:ea typeface="D2Coding"/>
+                <a:cs typeface="D2Coding"/>
               </a:rPr>
               <a:t>6</a:t>
             </a:r>
@@ -34190,9 +34190,9 @@
                 <a:solidFill>
                   <a:srgbClr val="7A869C"/>
                 </a:solidFill>
-                <a:latin typeface="나눔고딕코딩"/>
-                <a:ea typeface="나눔고딕코딩"/>
-                <a:cs typeface="나눔고딕코딩"/>
+                <a:latin typeface="D2Coding"/>
+                <a:ea typeface="D2Coding"/>
+                <a:cs typeface="D2Coding"/>
               </a:rPr>
               <a:t>7</a:t>
             </a:r>
@@ -34208,9 +34208,9 @@
                 <a:solidFill>
                   <a:srgbClr val="7A869C"/>
                 </a:solidFill>
-                <a:latin typeface="나눔고딕코딩"/>
-                <a:ea typeface="나눔고딕코딩"/>
-                <a:cs typeface="나눔고딕코딩"/>
+                <a:latin typeface="D2Coding"/>
+                <a:ea typeface="D2Coding"/>
+                <a:cs typeface="D2Coding"/>
               </a:rPr>
               <a:t>8</a:t>
             </a:r>
@@ -34226,9 +34226,9 @@
                 <a:solidFill>
                   <a:srgbClr val="7A869C"/>
                 </a:solidFill>
-                <a:latin typeface="나눔고딕코딩"/>
-                <a:ea typeface="나눔고딕코딩"/>
-                <a:cs typeface="나눔고딕코딩"/>
+                <a:latin typeface="D2Coding"/>
+                <a:ea typeface="D2Coding"/>
+                <a:cs typeface="D2Coding"/>
               </a:rPr>
               <a:t>9</a:t>
             </a:r>
@@ -34244,9 +34244,9 @@
                 <a:solidFill>
                   <a:srgbClr val="7A869C"/>
                 </a:solidFill>
-                <a:latin typeface="나눔고딕코딩"/>
-                <a:ea typeface="나눔고딕코딩"/>
-                <a:cs typeface="나눔고딕코딩"/>
+                <a:latin typeface="D2Coding"/>
+                <a:ea typeface="D2Coding"/>
+                <a:cs typeface="D2Coding"/>
               </a:rPr>
               <a:t>10</a:t>
             </a:r>
@@ -34262,9 +34262,9 @@
                 <a:solidFill>
                   <a:srgbClr val="7A869C"/>
                 </a:solidFill>
-                <a:latin typeface="나눔고딕코딩"/>
-                <a:ea typeface="나눔고딕코딩"/>
-                <a:cs typeface="나눔고딕코딩"/>
+                <a:latin typeface="D2Coding"/>
+                <a:ea typeface="D2Coding"/>
+                <a:cs typeface="D2Coding"/>
               </a:rPr>
               <a:t>11</a:t>
             </a:r>
@@ -34280,9 +34280,9 @@
                 <a:solidFill>
                   <a:srgbClr val="7A869C"/>
                 </a:solidFill>
-                <a:latin typeface="나눔고딕코딩"/>
-                <a:ea typeface="나눔고딕코딩"/>
-                <a:cs typeface="나눔고딕코딩"/>
+                <a:latin typeface="D2Coding"/>
+                <a:ea typeface="D2Coding"/>
+                <a:cs typeface="D2Coding"/>
               </a:rPr>
               <a:t>12</a:t>
             </a:r>
@@ -34298,9 +34298,9 @@
                 <a:solidFill>
                   <a:srgbClr val="7A869C"/>
                 </a:solidFill>
-                <a:latin typeface="나눔고딕코딩"/>
-                <a:ea typeface="나눔고딕코딩"/>
-                <a:cs typeface="나눔고딕코딩"/>
+                <a:latin typeface="D2Coding"/>
+                <a:ea typeface="D2Coding"/>
+                <a:cs typeface="D2Coding"/>
               </a:rPr>
               <a:t>13</a:t>
             </a:r>
@@ -34316,9 +34316,9 @@
                 <a:solidFill>
                   <a:srgbClr val="7A869C"/>
                 </a:solidFill>
-                <a:latin typeface="나눔고딕코딩"/>
-                <a:ea typeface="나눔고딕코딩"/>
-                <a:cs typeface="나눔고딕코딩"/>
+                <a:latin typeface="D2Coding"/>
+                <a:ea typeface="D2Coding"/>
+                <a:cs typeface="D2Coding"/>
               </a:rPr>
               <a:t>14</a:t>
             </a:r>
@@ -34357,9 +34357,9 @@
                 <a:solidFill>
                   <a:srgbClr val="E6EAF2"/>
                 </a:solidFill>
-                <a:latin typeface="나눔고딕코딩"/>
-                <a:ea typeface="나눔고딕코딩"/>
-                <a:cs typeface="나눔고딕코딩"/>
+                <a:latin typeface="D2Coding"/>
+                <a:ea typeface="D2Coding"/>
+                <a:cs typeface="D2Coding"/>
               </a:rPr>
               <a:t>SELECT o.order_id     AS 주문번호,</a:t>
             </a:r>
@@ -34375,9 +34375,9 @@
                 <a:solidFill>
                   <a:srgbClr val="E6EAF2"/>
                 </a:solidFill>
-                <a:latin typeface="나눔고딕코딩"/>
-                <a:ea typeface="나눔고딕코딩"/>
-                <a:cs typeface="나눔고딕코딩"/>
+                <a:latin typeface="D2Coding"/>
+                <a:ea typeface="D2Coding"/>
+                <a:cs typeface="D2Coding"/>
               </a:rPr>
               <a:t>       c.name         AS 고객,</a:t>
             </a:r>
@@ -34393,9 +34393,9 @@
                 <a:solidFill>
                   <a:srgbClr val="E6EAF2"/>
                 </a:solidFill>
-                <a:latin typeface="나눔고딕코딩"/>
-                <a:ea typeface="나눔고딕코딩"/>
-                <a:cs typeface="나눔고딕코딩"/>
+                <a:latin typeface="D2Coding"/>
+                <a:ea typeface="D2Coding"/>
+                <a:cs typeface="D2Coding"/>
               </a:rPr>
               <a:t>       p.name         AS 상품,</a:t>
             </a:r>
@@ -34411,9 +34411,9 @@
                 <a:solidFill>
                   <a:srgbClr val="E6EAF2"/>
                 </a:solidFill>
-                <a:latin typeface="나눔고딕코딩"/>
-                <a:ea typeface="나눔고딕코딩"/>
-                <a:cs typeface="나눔고딕코딩"/>
+                <a:latin typeface="D2Coding"/>
+                <a:ea typeface="D2Coding"/>
+                <a:cs typeface="D2Coding"/>
               </a:rPr>
               <a:t>       i.qty          AS 수량,</a:t>
             </a:r>
@@ -34429,9 +34429,9 @@
                 <a:solidFill>
                   <a:srgbClr val="E6EAF2"/>
                 </a:solidFill>
-                <a:latin typeface="나눔고딕코딩"/>
-                <a:ea typeface="나눔고딕코딩"/>
-                <a:cs typeface="나눔고딕코딩"/>
+                <a:latin typeface="D2Coding"/>
+                <a:ea typeface="D2Coding"/>
+                <a:cs typeface="D2Coding"/>
               </a:rPr>
               <a:t>       i.unit_price   AS 단가</a:t>
             </a:r>
@@ -34447,9 +34447,9 @@
                 <a:solidFill>
                   <a:srgbClr val="E6EAF2"/>
                 </a:solidFill>
-                <a:latin typeface="나눔고딕코딩"/>
-                <a:ea typeface="나눔고딕코딩"/>
-                <a:cs typeface="나눔고딕코딩"/>
+                <a:latin typeface="D2Coding"/>
+                <a:ea typeface="D2Coding"/>
+                <a:cs typeface="D2Coding"/>
               </a:rPr>
               <a:t>FROM   orders      o</a:t>
             </a:r>
@@ -34465,9 +34465,9 @@
                 <a:solidFill>
                   <a:srgbClr val="E6EAF2"/>
                 </a:solidFill>
-                <a:latin typeface="나눔고딕코딩"/>
-                <a:ea typeface="나눔고딕코딩"/>
-                <a:cs typeface="나눔고딕코딩"/>
+                <a:latin typeface="D2Coding"/>
+                <a:ea typeface="D2Coding"/>
+                <a:cs typeface="D2Coding"/>
               </a:rPr>
               <a:t>JOIN   customers   c ON o.cust_id  = c.cust_id</a:t>
             </a:r>
@@ -34483,9 +34483,9 @@
                 <a:solidFill>
                   <a:srgbClr val="E6EAF2"/>
                 </a:solidFill>
-                <a:latin typeface="나눔고딕코딩"/>
-                <a:ea typeface="나눔고딕코딩"/>
-                <a:cs typeface="나눔고딕코딩"/>
+                <a:latin typeface="D2Coding"/>
+                <a:ea typeface="D2Coding"/>
+                <a:cs typeface="D2Coding"/>
               </a:rPr>
               <a:t>JOIN   order_items i ON o.order_id = i.order_id</a:t>
             </a:r>
@@ -34501,9 +34501,9 @@
                 <a:solidFill>
                   <a:srgbClr val="E6EAF2"/>
                 </a:solidFill>
-                <a:latin typeface="나눔고딕코딩"/>
-                <a:ea typeface="나눔고딕코딩"/>
-                <a:cs typeface="나눔고딕코딩"/>
+                <a:latin typeface="D2Coding"/>
+                <a:ea typeface="D2Coding"/>
+                <a:cs typeface="D2Coding"/>
               </a:rPr>
               <a:t>JOIN   products    p ON i.prod_id  = p.prod_id</a:t>
             </a:r>
@@ -34519,9 +34519,9 @@
                 <a:solidFill>
                   <a:srgbClr val="E6EAF2"/>
                 </a:solidFill>
-                <a:latin typeface="나눔고딕코딩"/>
-                <a:ea typeface="나눔고딕코딩"/>
-                <a:cs typeface="나눔고딕코딩"/>
+                <a:latin typeface="D2Coding"/>
+                <a:ea typeface="D2Coding"/>
+                <a:cs typeface="D2Coding"/>
               </a:rPr>
               <a:t>WHERE  o.order_id = 1001;</a:t>
             </a:r>
@@ -34537,9 +34537,9 @@
                 <a:solidFill>
                   <a:srgbClr val="E6EAF2"/>
                 </a:solidFill>
-                <a:latin typeface="나눔고딕코딩"/>
-                <a:ea typeface="나눔고딕코딩"/>
-                <a:cs typeface="나눔고딕코딩"/>
+                <a:latin typeface="D2Coding"/>
+                <a:ea typeface="D2Coding"/>
+                <a:cs typeface="D2Coding"/>
               </a:rPr>
               <a:t>/*</a:t>
             </a:r>
@@ -34555,9 +34555,9 @@
                 <a:solidFill>
                   <a:srgbClr val="E6EAF2"/>
                 </a:solidFill>
-                <a:latin typeface="나눔고딕코딩"/>
-                <a:ea typeface="나눔고딕코딩"/>
-                <a:cs typeface="나눔고딕코딩"/>
+                <a:latin typeface="D2Coding"/>
+                <a:ea typeface="D2Coding"/>
+                <a:cs typeface="D2Coding"/>
               </a:rPr>
               <a:t> 1001 | 한가람 | 무선 전기포트    | 1 | 42000</a:t>
             </a:r>
@@ -34573,9 +34573,9 @@
                 <a:solidFill>
                   <a:srgbClr val="E6EAF2"/>
                 </a:solidFill>
-                <a:latin typeface="나눔고딕코딩"/>
-                <a:ea typeface="나눔고딕코딩"/>
-                <a:cs typeface="나눔고딕코딩"/>
+                <a:latin typeface="D2Coding"/>
+                <a:ea typeface="D2Coding"/>
+                <a:cs typeface="D2Coding"/>
               </a:rPr>
               <a:t> 1001 | 한가람 | 유기농 원두 500g | 2 | 18500</a:t>
             </a:r>
@@ -34591,9 +34591,9 @@
                 <a:solidFill>
                   <a:srgbClr val="E6EAF2"/>
                 </a:solidFill>
-                <a:latin typeface="나눔고딕코딩"/>
-                <a:ea typeface="나눔고딕코딩"/>
-                <a:cs typeface="나눔고딕코딩"/>
+                <a:latin typeface="D2Coding"/>
+                <a:ea typeface="D2Coding"/>
+                <a:cs typeface="D2Coding"/>
               </a:rPr>
               <a:t>*/</a:t>
             </a:r>
@@ -36810,9 +36810,9 @@
                 <a:solidFill>
                   <a:srgbClr val="7A869C"/>
                 </a:solidFill>
-                <a:latin typeface="나눔고딕코딩"/>
-                <a:ea typeface="나눔고딕코딩"/>
-                <a:cs typeface="나눔고딕코딩"/>
+                <a:latin typeface="D2Coding"/>
+                <a:ea typeface="D2Coding"/>
+                <a:cs typeface="D2Coding"/>
               </a:rPr>
               <a:t>1</a:t>
             </a:r>
@@ -36828,9 +36828,9 @@
                 <a:solidFill>
                   <a:srgbClr val="7A869C"/>
                 </a:solidFill>
-                <a:latin typeface="나눔고딕코딩"/>
-                <a:ea typeface="나눔고딕코딩"/>
-                <a:cs typeface="나눔고딕코딩"/>
+                <a:latin typeface="D2Coding"/>
+                <a:ea typeface="D2Coding"/>
+                <a:cs typeface="D2Coding"/>
               </a:rPr>
               <a:t>2</a:t>
             </a:r>
@@ -36846,9 +36846,9 @@
                 <a:solidFill>
                   <a:srgbClr val="7A869C"/>
                 </a:solidFill>
-                <a:latin typeface="나눔고딕코딩"/>
-                <a:ea typeface="나눔고딕코딩"/>
-                <a:cs typeface="나눔고딕코딩"/>
+                <a:latin typeface="D2Coding"/>
+                <a:ea typeface="D2Coding"/>
+                <a:cs typeface="D2Coding"/>
               </a:rPr>
               <a:t>3</a:t>
             </a:r>
@@ -36864,9 +36864,9 @@
                 <a:solidFill>
                   <a:srgbClr val="7A869C"/>
                 </a:solidFill>
-                <a:latin typeface="나눔고딕코딩"/>
-                <a:ea typeface="나눔고딕코딩"/>
-                <a:cs typeface="나눔고딕코딩"/>
+                <a:latin typeface="D2Coding"/>
+                <a:ea typeface="D2Coding"/>
+                <a:cs typeface="D2Coding"/>
               </a:rPr>
               <a:t>4</a:t>
             </a:r>
@@ -36882,9 +36882,9 @@
                 <a:solidFill>
                   <a:srgbClr val="7A869C"/>
                 </a:solidFill>
-                <a:latin typeface="나눔고딕코딩"/>
-                <a:ea typeface="나눔고딕코딩"/>
-                <a:cs typeface="나눔고딕코딩"/>
+                <a:latin typeface="D2Coding"/>
+                <a:ea typeface="D2Coding"/>
+                <a:cs typeface="D2Coding"/>
               </a:rPr>
               <a:t>5</a:t>
             </a:r>
@@ -36900,9 +36900,9 @@
                 <a:solidFill>
                   <a:srgbClr val="7A869C"/>
                 </a:solidFill>
-                <a:latin typeface="나눔고딕코딩"/>
-                <a:ea typeface="나눔고딕코딩"/>
-                <a:cs typeface="나눔고딕코딩"/>
+                <a:latin typeface="D2Coding"/>
+                <a:ea typeface="D2Coding"/>
+                <a:cs typeface="D2Coding"/>
               </a:rPr>
               <a:t>6</a:t>
             </a:r>
@@ -36918,9 +36918,9 @@
                 <a:solidFill>
                   <a:srgbClr val="7A869C"/>
                 </a:solidFill>
-                <a:latin typeface="나눔고딕코딩"/>
-                <a:ea typeface="나눔고딕코딩"/>
-                <a:cs typeface="나눔고딕코딩"/>
+                <a:latin typeface="D2Coding"/>
+                <a:ea typeface="D2Coding"/>
+                <a:cs typeface="D2Coding"/>
               </a:rPr>
               <a:t>7</a:t>
             </a:r>
@@ -36936,9 +36936,9 @@
                 <a:solidFill>
                   <a:srgbClr val="7A869C"/>
                 </a:solidFill>
-                <a:latin typeface="나눔고딕코딩"/>
-                <a:ea typeface="나눔고딕코딩"/>
-                <a:cs typeface="나눔고딕코딩"/>
+                <a:latin typeface="D2Coding"/>
+                <a:ea typeface="D2Coding"/>
+                <a:cs typeface="D2Coding"/>
               </a:rPr>
               <a:t>8</a:t>
             </a:r>
@@ -36977,9 +36977,9 @@
                 <a:solidFill>
                   <a:srgbClr val="E6EAF2"/>
                 </a:solidFill>
-                <a:latin typeface="나눔고딕코딩"/>
-                <a:ea typeface="나눔고딕코딩"/>
-                <a:cs typeface="나눔고딕코딩"/>
+                <a:latin typeface="D2Coding"/>
+                <a:ea typeface="D2Coding"/>
+                <a:cs typeface="D2Coding"/>
               </a:rPr>
               <a:t>SELECT o.order_id,</a:t>
             </a:r>
@@ -36995,9 +36995,9 @@
                 <a:solidFill>
                   <a:srgbClr val="E6EAF2"/>
                 </a:solidFill>
-                <a:latin typeface="나눔고딕코딩"/>
-                <a:ea typeface="나눔고딕코딩"/>
-                <a:cs typeface="나눔고딕코딩"/>
+                <a:latin typeface="D2Coding"/>
+                <a:ea typeface="D2Coding"/>
+                <a:cs typeface="D2Coding"/>
               </a:rPr>
               <a:t>       c.name                    AS 고객,</a:t>
             </a:r>
@@ -37013,9 +37013,9 @@
                 <a:solidFill>
                   <a:srgbClr val="E6EAF2"/>
                 </a:solidFill>
-                <a:latin typeface="나눔고딕코딩"/>
-                <a:ea typeface="나눔고딕코딩"/>
-                <a:cs typeface="나눔고딕코딩"/>
+                <a:latin typeface="D2Coding"/>
+                <a:ea typeface="D2Coding"/>
+                <a:cs typeface="D2Coding"/>
               </a:rPr>
               <a:t>       SUM(i.qty * i.unit_price) AS 결제금액</a:t>
             </a:r>
@@ -37031,9 +37031,9 @@
                 <a:solidFill>
                   <a:srgbClr val="E6EAF2"/>
                 </a:solidFill>
-                <a:latin typeface="나눔고딕코딩"/>
-                <a:ea typeface="나눔고딕코딩"/>
-                <a:cs typeface="나눔고딕코딩"/>
+                <a:latin typeface="D2Coding"/>
+                <a:ea typeface="D2Coding"/>
+                <a:cs typeface="D2Coding"/>
               </a:rPr>
               <a:t>FROM   orders o</a:t>
             </a:r>
@@ -37049,9 +37049,9 @@
                 <a:solidFill>
                   <a:srgbClr val="E6EAF2"/>
                 </a:solidFill>
-                <a:latin typeface="나눔고딕코딩"/>
-                <a:ea typeface="나눔고딕코딩"/>
-                <a:cs typeface="나눔고딕코딩"/>
+                <a:latin typeface="D2Coding"/>
+                <a:ea typeface="D2Coding"/>
+                <a:cs typeface="D2Coding"/>
               </a:rPr>
               <a:t>JOIN   customers   c ON o.cust_id  = c.cust_id</a:t>
             </a:r>
@@ -37067,9 +37067,9 @@
                 <a:solidFill>
                   <a:srgbClr val="E6EAF2"/>
                 </a:solidFill>
-                <a:latin typeface="나눔고딕코딩"/>
-                <a:ea typeface="나눔고딕코딩"/>
-                <a:cs typeface="나눔고딕코딩"/>
+                <a:latin typeface="D2Coding"/>
+                <a:ea typeface="D2Coding"/>
+                <a:cs typeface="D2Coding"/>
               </a:rPr>
               <a:t>JOIN   order_items i ON o.order_id = i.order_id</a:t>
             </a:r>
@@ -37085,9 +37085,9 @@
                 <a:solidFill>
                   <a:srgbClr val="E6EAF2"/>
                 </a:solidFill>
-                <a:latin typeface="나눔고딕코딩"/>
-                <a:ea typeface="나눔고딕코딩"/>
-                <a:cs typeface="나눔고딕코딩"/>
+                <a:latin typeface="D2Coding"/>
+                <a:ea typeface="D2Coding"/>
+                <a:cs typeface="D2Coding"/>
               </a:rPr>
               <a:t>GROUP  BY o.order_id, c.name</a:t>
             </a:r>
@@ -37103,9 +37103,9 @@
                 <a:solidFill>
                   <a:srgbClr val="E6EAF2"/>
                 </a:solidFill>
-                <a:latin typeface="나눔고딕코딩"/>
-                <a:ea typeface="나눔고딕코딩"/>
-                <a:cs typeface="나눔고딕코딩"/>
+                <a:latin typeface="D2Coding"/>
+                <a:ea typeface="D2Coding"/>
+                <a:cs typeface="D2Coding"/>
               </a:rPr>
               <a:t>ORDER  BY o.order_id;</a:t>
             </a:r>
